--- a/Overtime_Admin_Manual.pptx
+++ b/Overtime_Admin_Manual.pptx
@@ -3176,7 +3176,7 @@
               </a:defRPr>
             </a:pPr>
             <a:r>
-              <a:t>SMART OVERTIME SYSTEM v1.36  |  관리자 및 운영자 전용 가이드</a:t>
+              <a:t>SMART OVERTIME SYSTEM v1.37  |  관리자 및 운영자 전용 가이드</a:t>
             </a:r>
           </a:p>
           <a:p>
@@ -3195,7 +3195,7 @@
             </a:r>
             <a:br/>
             <a:r>
-              <a:t>관리자 모드 운영 매뉴얼 (v1.36)</a:t>
+              <a:t>관리자 모드 운영 매뉴얼 (v1.37)</a:t>
             </a:r>
           </a:p>
           <a:p>
@@ -3210,7 +3210,7 @@
               </a:defRPr>
             </a:pPr>
             <a:r>
-              <a:t>보안 감사 로그, 캘린더 색상 범례, 팀원 대리 신청(비밀 보너스), 권한 격리, 실특근 정산 및 엑셀 원장 관리자 공식 가이드입니다.</a:t>
+              <a:t>Turso 클라우드 영구 DB 연동, 보안 감사 로그, 캘린더 색상 범례, 비밀 보너스, 권한 격리 및 실특근 엑셀 원장 관리자 공식 가이드입니다.</a:t>
             </a:r>
           </a:p>
           <a:p>
@@ -3222,7 +3222,7 @@
               </a:defRPr>
             </a:pPr>
             <a:r>
-              <a:t>배포 버전: v1.36 (2026-09-17)  |  총괄 슈퍼관리자 및 부서 팀관리자 전용</a:t>
+              <a:t>배포 버전: v1.37 (2026-09-17)  |  총괄 슈퍼관리자 및 부서 팀관리자 전용</a:t>
             </a:r>
           </a:p>
         </p:txBody>
@@ -3703,7 +3703,7 @@
               </a:defRPr>
             </a:pPr>
             <a:r>
-              <a:t>자주 묻는 질문(Q&amp;A)과 관리자 운영 꿀팁 총정리 (v1.36)</a:t>
+              <a:t>자주 묻는 질문(Q&amp;A)과 관리자 운영 꿀팁 총정리 (v1.37)</a:t>
             </a:r>
           </a:p>
           <a:p>
@@ -4095,7 +4095,7 @@
               </a:defRPr>
             </a:pPr>
             <a:r>
-              <a:t>👉 오직 총괄 슈퍼관리자만 열람할 수 있으며, 로그인 시도(성공/실패), 신규 등록, 접속 IP 및 User-Agent 정보를 실시간 추적하고 엑셀로 추출합니다.</a:t>
+              <a:t>👉 오직 총괄 슈퍼관리자만 열람할 수 있으며, 로그인 시도(성공/실패), 신규 등록, 접속 IP/기기 정보를 실시간 추적하고 엑셀로 추출합니다.</a:t>
             </a:r>
           </a:p>
         </p:txBody>
@@ -4178,7 +4178,7 @@
               </a:defRPr>
             </a:pPr>
             <a:r>
-              <a:t>Q5. 웹 저장 및 열기 기능은 일반 사원도 볼 수 있나요?</a:t>
+              <a:t>Q5. 서버가 재부팅되어도 인원과 특근 데이터가 영구 보존되나요?</a:t>
             </a:r>
           </a:p>
           <a:p>
@@ -4190,7 +4190,7 @@
               </a:defRPr>
             </a:pPr>
             <a:r>
-              <a:t>👉 사원 화면에서는 숨김 처리되어 일반 사원은 볼 수 없으며, 관리자 모드에서만 안전하게 조작할 수 있습니다.</a:t>
+              <a:t>👉 네! v1.37부터 Turso 무료 클라우드 DB 연동을 완비하여 Render 재부팅/재배포와 무관하게 모든 데이터가 안전하게 영구 보존됩니다.</a:t>
             </a:r>
           </a:p>
         </p:txBody>

--- a/Overtime_Admin_Manual.pptx
+++ b/Overtime_Admin_Manual.pptx
@@ -3176,7 +3176,7 @@
               </a:defRPr>
             </a:pPr>
             <a:r>
-              <a:t>SMART OVERTIME SYSTEM v1.37  |  관리자 및 운영자 전용 가이드</a:t>
+              <a:t>SMART OVERTIME SYSTEM v1.38  |  관리자 및 운영자 전용 가이드</a:t>
             </a:r>
           </a:p>
           <a:p>
@@ -3195,7 +3195,7 @@
             </a:r>
             <a:br/>
             <a:r>
-              <a:t>관리자 모드 운영 매뉴얼 (v1.37)</a:t>
+              <a:t>관리자 모드 운영 매뉴얼 (v1.38)</a:t>
             </a:r>
           </a:p>
           <a:p>
@@ -3210,7 +3210,7 @@
               </a:defRPr>
             </a:pPr>
             <a:r>
-              <a:t>Turso 클라우드 영구 DB 연동, 보안 감사 로그, 캘린더 색상 범례, 비밀 보너스, 권한 격리 및 실특근 엑셀 원장 관리자 공식 가이드입니다.</a:t>
+              <a:t>Turso 클라우드 초고속 가속화 엔진, 실시간 진행 피드백, 보안 감사 로그, 캘린더 색상 범례, 비밀 보너스, 권한 격리 및 실특근 엑셀 원장 관리자 공식 가이드입니다.</a:t>
             </a:r>
           </a:p>
           <a:p>
@@ -3222,7 +3222,7 @@
               </a:defRPr>
             </a:pPr>
             <a:r>
-              <a:t>배포 버전: v1.37 (2026-09-17)  |  총괄 슈퍼관리자 및 부서 팀관리자 전용</a:t>
+              <a:t>배포 버전: v1.38 (2026-09-17)  |  총괄 슈퍼관리자 및 부서 팀관리자 전용</a:t>
             </a:r>
           </a:p>
         </p:txBody>
@@ -3703,7 +3703,7 @@
               </a:defRPr>
             </a:pPr>
             <a:r>
-              <a:t>자주 묻는 질문(Q&amp;A)과 관리자 운영 꿀팁 총정리 (v1.37)</a:t>
+              <a:t>자주 묻는 질문(Q&amp;A)과 관리자 운영 꿀팁 총정리 (v1.38)</a:t>
             </a:r>
           </a:p>
           <a:p>
@@ -4190,7 +4190,7 @@
               </a:defRPr>
             </a:pPr>
             <a:r>
-              <a:t>👉 네! v1.37부터 Turso 무료 클라우드 DB 연동을 완비하여 Render 재부팅/재배포와 무관하게 모든 데이터가 안전하게 영구 보존됩니다.</a:t>
+              <a:t>👉 네! Turso 클라우드 영구 DB 연동으로 모든 데이터가 안전 보존되며, v1.38부터 HTTP Keep-Alive 영구 세션 풀링 및 스마트 인메모리 캐시를 탑재하여 로컬 수준의 초고속 반응 속도를 완벽 보장합니다.</a:t>
             </a:r>
           </a:p>
         </p:txBody>

--- a/Overtime_Admin_Manual.pptx
+++ b/Overtime_Admin_Manual.pptx
@@ -3176,7 +3176,7 @@
               </a:defRPr>
             </a:pPr>
             <a:r>
-              <a:t>SMART OVERTIME SYSTEM v1.38  |  관리자 및 운영자 전용 가이드</a:t>
+              <a:t>SMART OVERTIME SYSTEM v1.40  |  관리자 및 운영자 전용 가이드</a:t>
             </a:r>
           </a:p>
           <a:p>
@@ -3195,7 +3195,7 @@
             </a:r>
             <a:br/>
             <a:r>
-              <a:t>관리자 모드 운영 매뉴얼 (v1.38)</a:t>
+              <a:t>관리자 모드 운영 매뉴얼 (v1.40)</a:t>
             </a:r>
           </a:p>
           <a:p>
@@ -3210,7 +3210,7 @@
               </a:defRPr>
             </a:pPr>
             <a:r>
-              <a:t>Turso 클라우드 초고속 가속화 엔진, 실시간 진행 피드백, 보안 감사 로그, 캘린더 색상 범례, 비밀 보너스, 권한 격리 및 실특근 엑셀 원장 관리자 공식 가이드입니다.</a:t>
+              <a:t>승인 특근 전용 수정/삭제 제어, 슈퍼관리자 승격/하야 엔진, 캘린더 네비게이션 시인성 상향 및 스마트폰 모바일 완벽 반응형 관리자 공식 가이드입니다.</a:t>
             </a:r>
           </a:p>
           <a:p>
@@ -3222,7 +3222,7 @@
               </a:defRPr>
             </a:pPr>
             <a:r>
-              <a:t>배포 버전: v1.38 (2026-09-17)  |  총괄 슈퍼관리자 및 부서 팀관리자 전용</a:t>
+              <a:t>배포 버전: v1.40 (2026-09-18)  |  총괄 슈퍼관리자 및 부서 팀관리자 전용</a:t>
             </a:r>
           </a:p>
         </p:txBody>
@@ -3703,7 +3703,7 @@
               </a:defRPr>
             </a:pPr>
             <a:r>
-              <a:t>자주 묻는 질문(Q&amp;A)과 관리자 운영 꿀팁 총정리 (v1.38)</a:t>
+              <a:t>자주 묻는 질문(Q&amp;A)과 관리자 운영 꿀팁 총정리 (v1.40)</a:t>
             </a:r>
           </a:p>
           <a:p>
@@ -4000,7 +4000,7 @@
               </a:defRPr>
             </a:pPr>
             <a:r>
-              <a:t>👉 팀관리자는 본인 팀원의 승인/수정만 가능하며, 팀원 소속팀 변경 및 관리자 권한 지정은 오직 총괄관리자만 가능합니다.</a:t>
+              <a:t>👉 팀관리자는 본인 팀원의 승인/수정만 가능하며, 팀원 소속팀 변경, 슈퍼관리자 승격/하야 지정은 오직 총괄관리자만 가능합니다.</a:t>
             </a:r>
           </a:p>
         </p:txBody>
@@ -4083,7 +4083,7 @@
               </a:defRPr>
             </a:pPr>
             <a:r>
-              <a:t>Q4. 시스템 접속 및 보안 감사 로그는 누가 볼 수 있나요?</a:t>
+              <a:t>Q4. 승인 완료된 특근을 사원이 임의로 수정하거나 삭제할 수 있나요?</a:t>
             </a:r>
           </a:p>
           <a:p>
@@ -4095,7 +4095,7 @@
               </a:defRPr>
             </a:pPr>
             <a:r>
-              <a:t>👉 오직 총괄 슈퍼관리자만 열람할 수 있으며, 로그인 시도(성공/실패), 신규 등록, 접속 IP/기기 정보를 실시간 추적하고 엑셀로 추출합니다.</a:t>
+              <a:t>👉 아닙니다. v1.40부터 승인된 특근은 일반 사원의 수정/삭제가 원천 차단되며, 오직 관리자 모드에서 관리자만 수정 또는 삭제할 수 있습니다.</a:t>
             </a:r>
           </a:p>
         </p:txBody>
@@ -4190,7 +4190,7 @@
               </a:defRPr>
             </a:pPr>
             <a:r>
-              <a:t>👉 네! Turso 클라우드 영구 DB 연동으로 모든 데이터가 안전 보존되며, v1.38부터 HTTP Keep-Alive 영구 세션 풀링 및 스마트 인메모리 캐시를 탑재하여 로컬 수준의 초고속 반응 속도를 완벽 보장합니다.</a:t>
+              <a:t>👉 네! Turso 클라우드 영구 DB 연동으로 모든 데이터가 안전 보존되며, v1.40의 안전 스마트 폴백과 스레드 보호로 특근 신청과 데이터 무결성을 완벽하게 보장합니다.</a:t>
             </a:r>
           </a:p>
         </p:txBody>

--- a/Overtime_Admin_Manual.pptx
+++ b/Overtime_Admin_Manual.pptx
@@ -3176,7 +3176,7 @@
               </a:defRPr>
             </a:pPr>
             <a:r>
-              <a:t>SMART OVERTIME SYSTEM v1.40  |  관리자 및 운영자 전용 가이드</a:t>
+              <a:t>SMART OVERTIME SYSTEM v1.41  |  관리자 및 운영자 전용 가이드</a:t>
             </a:r>
           </a:p>
           <a:p>
@@ -3195,7 +3195,7 @@
             </a:r>
             <a:br/>
             <a:r>
-              <a:t>관리자 모드 운영 매뉴얼 (v1.40)</a:t>
+              <a:t>관리자 모드 운영 매뉴얼 (v1.41)</a:t>
             </a:r>
           </a:p>
           <a:p>
@@ -3210,7 +3210,7 @@
               </a:defRPr>
             </a:pPr>
             <a:r>
-              <a:t>승인 특근 전용 수정/삭제 제어, 슈퍼관리자 승격/하야 엔진, 캘린더 네비게이션 시인성 상향 및 스마트폰 모바일 완벽 반응형 관리자 공식 가이드입니다.</a:t>
+              <a:t>3단계 권한 관리, 원클릭 사전차감 토글, 대체휴무 체계 개편, 신청자 통계 팝업 및 정산표 엑셀까지 완벽 지원하는 관리자 공식 가이드입니다.</a:t>
             </a:r>
           </a:p>
           <a:p>
@@ -3222,7 +3222,7 @@
               </a:defRPr>
             </a:pPr>
             <a:r>
-              <a:t>배포 버전: v1.40 (2026-09-18)  |  총괄 슈퍼관리자 및 부서 팀관리자 전용</a:t>
+              <a:t>배포 버전: v1.41 (2026-09-18)  |  총괄 슈퍼관리자 및 부서 팀관리자 전용</a:t>
             </a:r>
           </a:p>
         </p:txBody>

--- a/Overtime_Admin_Manual.pptx
+++ b/Overtime_Admin_Manual.pptx
@@ -3176,7 +3176,7 @@
               </a:defRPr>
             </a:pPr>
             <a:r>
-              <a:t>SMART OVERTIME SYSTEM v1.41  |  관리자 및 운영자 전용 가이드</a:t>
+              <a:t>SMART OVERTIME SYSTEM v1.42  |  관리자 및 운영자 전용 가이드</a:t>
             </a:r>
           </a:p>
           <a:p>
@@ -3195,7 +3195,7 @@
             </a:r>
             <a:br/>
             <a:r>
-              <a:t>관리자 모드 운영 매뉴얼 (v1.41)</a:t>
+              <a:t>관리자 모드 운영 매뉴얼 (v1.42)</a:t>
             </a:r>
           </a:p>
           <a:p>
@@ -3222,7 +3222,7 @@
               </a:defRPr>
             </a:pPr>
             <a:r>
-              <a:t>배포 버전: v1.41 (2026-09-18)  |  총괄 슈퍼관리자 및 부서 팀관리자 전용</a:t>
+              <a:t>배포 버전: v1.42 (2026-09-18)  |  총괄 슈퍼관리자 및 부서 팀관리자 전용</a:t>
             </a:r>
           </a:p>
         </p:txBody>
@@ -3703,7 +3703,7 @@
               </a:defRPr>
             </a:pPr>
             <a:r>
-              <a:t>자주 묻는 질문(Q&amp;A)과 관리자 운영 꿀팁 총정리 (v1.40)</a:t>
+              <a:t>자주 묻는 질문(Q&amp;A)과 관리자 운영 꿀팁 총정리 (v1.42)</a:t>
             </a:r>
           </a:p>
           <a:p>
@@ -4095,7 +4095,7 @@
               </a:defRPr>
             </a:pPr>
             <a:r>
-              <a:t>👉 아닙니다. v1.40부터 승인된 특근은 일반 사원의 수정/삭제가 원천 차단되며, 오직 관리자 모드에서 관리자만 수정 또는 삭제할 수 있습니다.</a:t>
+              <a:t>👉 아닙니다. v1.42부터 승인된 특근은 일반 사원의 수정/삭제가 원천 차단되며, 오직 관리자 모드에서 관리자만 수정 또는 삭제할 수 있습니다.</a:t>
             </a:r>
           </a:p>
         </p:txBody>
@@ -4190,7 +4190,7 @@
               </a:defRPr>
             </a:pPr>
             <a:r>
-              <a:t>👉 네! Turso 클라우드 영구 DB 연동으로 모든 데이터가 안전 보존되며, v1.40의 안전 스마트 폴백과 스레드 보호로 특근 신청과 데이터 무결성을 완벽하게 보장합니다.</a:t>
+              <a:t>👉 네! Turso 클라우드 영구 DB 연동으로 모든 데이터가 안전 보존되며, v1.42의 안전 스마트 폴백과 스레드 보호로 특근 신청과 데이터 무결성을 완벽하게 보장합니다.</a:t>
             </a:r>
           </a:p>
         </p:txBody>
@@ -5760,7 +5760,7 @@
               </a:defRPr>
             </a:pPr>
             <a:r>
-              <a:t>① 명확한 실특근 산정 공식</a:t>
+              <a:t>① 최신 실특근 산정 공식 (v1.42)</a:t>
             </a:r>
           </a:p>
           <a:p>
@@ -5775,7 +5775,7 @@
               </a:defRPr>
             </a:pPr>
             <a:r>
-              <a:t>★ 실특근 인정일 = 일반휴일 근무일 - 대체휴일 사용일 (대체근무/법정휴일은 산정에서 자동 분리)</a:t>
+              <a:t>★ 최종 실특근일 = 일반특근 - 사전차감 - (대체휴무 - 대체휴무시 작성한 출장기간 이내의 사전차감)</a:t>
             </a:r>
           </a:p>
           <a:p>
@@ -5790,7 +5790,7 @@
               </a:defRPr>
             </a:pPr>
             <a:r>
-              <a:t>② 부서별 실특근 요약 카드</a:t>
+              <a:t>② 사전차감 잔여수 분리 산출</a:t>
             </a:r>
           </a:p>
           <a:p>
@@ -5805,7 +5805,7 @@
               </a:defRPr>
             </a:pPr>
             <a:r>
-              <a:t>소속 부서별 총 근무일, 제외 일수, 대체휴일 사용일 및 최종 실특근일을 대형 통계 카드로 제공합니다.</a:t>
+              <a:t>★ 사전차감 잔여수 = 총 사전차감수 - (대체휴무 시 설정된 출장기간 내 사전차감 수)</a:t>
             </a:r>
           </a:p>
           <a:p>
@@ -5820,7 +5820,7 @@
               </a:defRPr>
             </a:pPr>
             <a:r>
-              <a:t>③ 개인별 정산 명세 테이블</a:t>
+              <a:t>③ 개인별 정산 및 통계 팝업 개편</a:t>
             </a:r>
           </a:p>
           <a:p>
@@ -5835,7 +5835,7 @@
               </a:defRPr>
             </a:pPr>
             <a:r>
-              <a:t>사원별 4대 휴일 지표와 최종 실특근 일수를 정렬 가능한 테이블로 한눈에 검토합니다.</a:t>
+              <a:t>사원별 최근 3개월(7/8/9월), 1~4분기, 상/하반기, 연도별 집계와 사전차감 잔여수 독립 제공</a:t>
             </a:r>
           </a:p>
           <a:p>
@@ -5850,7 +5850,7 @@
               </a:defRPr>
             </a:pPr>
             <a:r>
-              <a:t>④ 정산표 엑셀 원클릭 추출</a:t>
+              <a:t>④ 정산표 엑셀 원클릭 추출 &amp; 수식 명시</a:t>
             </a:r>
           </a:p>
           <a:p>
@@ -5865,7 +5865,7 @@
               </a:defRPr>
             </a:pPr>
             <a:r>
-              <a:t>[📥 정산표 엑셀 내보내기] 버튼으로 월말 보고용 정산 파일을 즉시 다운로드합니다.</a:t>
+              <a:t>엑셀 헤더에 산출 수식 및 취합 기간/일시 자동 명기, [📥 정산표 엑셀] 즉시 다운로드</a:t>
             </a:r>
           </a:p>
         </p:txBody>

--- a/Overtime_Admin_Manual.pptx
+++ b/Overtime_Admin_Manual.pptx
@@ -3176,7 +3176,7 @@
               </a:defRPr>
             </a:pPr>
             <a:r>
-              <a:t>SMART OVERTIME SYSTEM v1.42  |  관리자 및 운영자 전용 가이드</a:t>
+              <a:t>SMART OVERTIME SYSTEM v1.43  |  관리자 및 운영자 전용 가이드</a:t>
             </a:r>
           </a:p>
           <a:p>
@@ -3195,7 +3195,7 @@
             </a:r>
             <a:br/>
             <a:r>
-              <a:t>관리자 모드 운영 매뉴얼 (v1.42)</a:t>
+              <a:t>관리자 모드 운영 매뉴얼 (v1.43)</a:t>
             </a:r>
           </a:p>
           <a:p>
@@ -3210,7 +3210,7 @@
               </a:defRPr>
             </a:pPr>
             <a:r>
-              <a:t>3단계 권한 관리, 원클릭 사전차감 토글, 대체휴무 체계 개편, 신청자 통계 팝업 및 정산표 엑셀까지 완벽 지원하는 관리자 공식 가이드입니다.</a:t>
+              <a:t>보너스 수정 지원, 선택 일괄 삭제, 사용자/관리자 수정 모달 분리, 정산표 엑셀 수식 최적화까지 완벽 지원하는 관리자 공식 가이드입니다.</a:t>
             </a:r>
           </a:p>
           <a:p>
@@ -3222,7 +3222,7 @@
               </a:defRPr>
             </a:pPr>
             <a:r>
-              <a:t>배포 버전: v1.42 (2026-09-18)  |  총괄 슈퍼관리자 및 부서 팀관리자 전용</a:t>
+              <a:t>배포 버전: v1.43 (2026-09-18)  |  총괄 슈퍼관리자 및 부서 팀관리자 전용</a:t>
             </a:r>
           </a:p>
         </p:txBody>
@@ -3703,7 +3703,7 @@
               </a:defRPr>
             </a:pPr>
             <a:r>
-              <a:t>자주 묻는 질문(Q&amp;A)과 관리자 운영 꿀팁 총정리 (v1.42)</a:t>
+              <a:t>자주 묻는 질문(Q&amp;A)과 관리자 운영 꿀팁 총정리 (v1.43)</a:t>
             </a:r>
           </a:p>
           <a:p>
@@ -4190,7 +4190,7 @@
               </a:defRPr>
             </a:pPr>
             <a:r>
-              <a:t>👉 네! Turso 클라우드 영구 DB 연동으로 모든 데이터가 안전 보존되며, v1.42의 안전 스마트 폴백과 스레드 보호로 특근 신청과 데이터 무결성을 완벽하게 보장합니다.</a:t>
+              <a:t>👉 네! Turso 클라우드 영구 DB 연동으로 모든 데이터가 안전 보존되며, v1.43의 안전 스마트 폴백과 스레드 보호로 특근 신청과 데이터 무결성을 완벽하게 보장합니다.</a:t>
             </a:r>
           </a:p>
         </p:txBody>
@@ -5760,7 +5760,7 @@
               </a:defRPr>
             </a:pPr>
             <a:r>
-              <a:t>① 최신 실특근 산정 공식 (v1.42)</a:t>
+              <a:t>① 최신 실특근 산정 공식 (v1.43)</a:t>
             </a:r>
           </a:p>
           <a:p>
@@ -5775,7 +5775,11 @@
               </a:defRPr>
             </a:pPr>
             <a:r>
-              <a:t>★ 최종 실특근일 = 일반특근 - 사전차감 - (대체휴무 - 대체휴무시 작성한 출장기간 이내의 사전차감)</a:t>
+              <a:t>★ 총특근일수 = 대체근무 + 법정휴일 + 일반휴일 (대체휴무 제외 표준화)</a:t>
+            </a:r>
+            <a:br/>
+            <a:r>
+              <a:t>★ 최종 실특근일 = 일반특근 - 사전차감 - (대체휴무 - 대체휴무시 출장기간 내 사전차감)</a:t>
             </a:r>
           </a:p>
           <a:p>
@@ -5790,7 +5794,7 @@
               </a:defRPr>
             </a:pPr>
             <a:r>
-              <a:t>② 사전차감 잔여수 분리 산출</a:t>
+              <a:t>② 사전차감 잔여수 &amp; 보너스 건수</a:t>
             </a:r>
           </a:p>
           <a:p>
@@ -5805,7 +5809,7 @@
               </a:defRPr>
             </a:pPr>
             <a:r>
-              <a:t>★ 사전차감 잔여수 = 총 사전차감수 - (대체휴무 시 설정된 출장기간 내 사전차감 수)</a:t>
+              <a:t>★ 사전차감 잔여수 = 총 사전차감수 - 출장기간 내 사전차감수 / 사원별 [보너스 부여 (건)] 개수 독립 산출</a:t>
             </a:r>
           </a:p>
           <a:p>
@@ -5865,7 +5869,7 @@
               </a:defRPr>
             </a:pPr>
             <a:r>
-              <a:t>엑셀 헤더에 산출 수식 및 취합 기간/일시 자동 명기, [📥 정산표 엑셀] 즉시 다운로드</a:t>
+              <a:t>엑셀 중복 '대체휴가 사용일수' 제거, 헤더에 산출 수식 및 취합 기간/일시 자동 명기</a:t>
             </a:r>
           </a:p>
         </p:txBody>
@@ -5954,7 +5958,7 @@
               </a:defRPr>
             </a:pPr>
             <a:r>
-              <a:t>엑셀 [보너스 부여] 기재 및 3대 양식</a:t>
+              <a:t>보너스 수정 · 일괄 삭제 및 엑셀 정산</a:t>
             </a:r>
           </a:p>
           <a:p>
@@ -5966,7 +5970,7 @@
               </a:defRPr>
             </a:pPr>
             <a:r>
-              <a:t>고품질 엑셀 추출과 보너스 부여 명시를 완벽히 지원합니다.</a:t>
+              <a:t>관리자 보너스 관리, 일괄 삭제 및 엑셀 정산표를 완벽히 지원합니다.</a:t>
             </a:r>
           </a:p>
         </p:txBody>
@@ -6049,7 +6053,7 @@
               </a:defRPr>
             </a:pPr>
             <a:r>
-              <a:t>① 엑셀 파일 내 [보너스 부여] 열 기재 (요구사항 4)</a:t>
+              <a:t>① 관리자 모드 [보너스 부여 여부] 수정</a:t>
             </a:r>
           </a:p>
           <a:p>
@@ -6064,7 +6068,7 @@
               </a:defRPr>
             </a:pPr>
             <a:r>
-              <a:t>휴일일자별 특근현황 및 특근신청 원장 시트에 [보너스 부여] 열이 추가되어 부여(O)/미부여(-) 상태가 명시됩니다.</a:t>
+              <a:t>관리자 특근 수정 모달에서 [🎁 보너스 부여 여부] 토글 스위치를 통해 보너스 부여 상태를 직접 ON/OFF 변경 가능</a:t>
             </a:r>
           </a:p>
           <a:p>
@@ -6079,7 +6083,7 @@
               </a:defRPr>
             </a:pPr>
             <a:r>
-              <a:t>② 날짜순 오름차순 전개 &amp; 순수 숫자 셀</a:t>
+              <a:t>② 관리자 테이블 [선택 일괄 삭제] 신설</a:t>
             </a:r>
           </a:p>
           <a:p>
@@ -6094,7 +6098,7 @@
               </a:defRPr>
             </a:pPr>
             <a:r>
-              <a:t>모든 일자가 하루단위로 펼쳐지며, 일수 셀이 순수 숫자(int/float)로 저장되어 수식 오류가 전혀 없습니다.</a:t>
+              <a:t>테이블 목록에서 체크박스로 여러 특근 건을 선택 후 [🗑️ 선택 일괄 삭제] 클릭 시 안전 컨펌 후 일괄 삭제</a:t>
             </a:r>
           </a:p>
           <a:p>
@@ -6109,7 +6113,7 @@
               </a:defRPr>
             </a:pPr>
             <a:r>
-              <a:t>③ 개인별 휴일합산 정산표 제공</a:t>
+              <a:t>③ 사용자 / 관리자 수정 모달 완전 분리</a:t>
             </a:r>
           </a:p>
           <a:p>
@@ -6124,7 +6128,7 @@
               </a:defRPr>
             </a:pPr>
             <a:r>
-              <a:t>두 번째 시트에 인원별 4대 휴일수 및 최종 실특근일이 완벽히 합산 정산됩니다.</a:t>
+              <a:t>일반 사원 수정 창에는 사전차감/보너스 항목이 원천 미노출되며, 관리자 창에서만 전담 제어</a:t>
             </a:r>
           </a:p>
           <a:p>
@@ -6139,7 +6143,7 @@
               </a:defRPr>
             </a:pPr>
             <a:r>
-              <a:t>④ openpyxl 고속 서버 엑셀 엔진</a:t>
+              <a:t>④ openpyxl 고속 서버 엑셀 엔진 동기화</a:t>
             </a:r>
           </a:p>
           <a:p>
@@ -6154,7 +6158,7 @@
               </a:defRPr>
             </a:pPr>
             <a:r>
-              <a:t>수천 건의 특근 데이터도 엑셀 수식과 서식을 온전히 유지하며 실시간 스트리밍으로 다운로드합니다.</a:t>
+              <a:t>엑셀 Sheet 2에 [총 특근일수], [보너스 부여 (건)] 반영 및 클라이언트 SheetJS와 100% 동일 포맷 유지</a:t>
             </a:r>
           </a:p>
         </p:txBody>

--- a/Overtime_Admin_Manual.pptx
+++ b/Overtime_Admin_Manual.pptx
@@ -16,6 +16,9 @@
     <p:sldId id="264" r:id="rId15"/>
     <p:sldId id="265" r:id="rId16"/>
     <p:sldId id="266" r:id="rId17"/>
+    <p:sldId id="267" r:id="rId18"/>
+    <p:sldId id="268" r:id="rId19"/>
+    <p:sldId id="269" r:id="rId20"/>
   </p:sldIdLst>
   <p:sldSz cx="12191695" cy="6858000" type="screen4x3"/>
   <p:notesSz cx="6858000" cy="9144000"/>
@@ -3176,7 +3179,7 @@
               </a:defRPr>
             </a:pPr>
             <a:r>
-              <a:t>SMART OVERTIME SYSTEM v1.43  |  관리자 및 운영자 전용 가이드</a:t>
+              <a:t>SMART OVERTIME SYSTEM v1.44  |  관리자 및 운영자 전용 가이드</a:t>
             </a:r>
           </a:p>
           <a:p>
@@ -3195,7 +3198,7 @@
             </a:r>
             <a:br/>
             <a:r>
-              <a:t>관리자 모드 운영 매뉴얼 (v1.43)</a:t>
+              <a:t>관리자 모드 운영 매뉴얼 (v1.44)</a:t>
             </a:r>
           </a:p>
           <a:p>
@@ -3210,7 +3213,7 @@
               </a:defRPr>
             </a:pPr>
             <a:r>
-              <a:t>보너스 수정 지원, 선택 일괄 삭제, 사용자/관리자 수정 모달 분리, 정산표 엑셀 수식 최적화까지 완벽 지원하는 관리자 공식 가이드입니다.</a:t>
+              <a:t>특근 4단계 라이프사이클(신청·승인·확정·검토), 엑셀 단계별 일수 구분 집계, 100% 무기명 소통함 운영까지 완벽 지원하는 관리자 공식 가이드입니다.</a:t>
             </a:r>
           </a:p>
           <a:p>
@@ -3222,7 +3225,7 @@
               </a:defRPr>
             </a:pPr>
             <a:r>
-              <a:t>배포 버전: v1.43 (2026-09-18)  |  총괄 슈퍼관리자 및 부서 팀관리자 전용</a:t>
+              <a:t>배포 버전: v1.44 (2026-09-21)  |  총괄 슈퍼관리자 및 부서 팀관리자 전용</a:t>
             </a:r>
           </a:p>
         </p:txBody>
@@ -3275,7 +3278,7 @@
               </a:defRPr>
             </a:pPr>
             <a:r>
-              <a:t>STEP 09  |  스마트폰 모바일 및 외부망 접속 관리</a:t>
+              <a:t>STEP 09  |  사원 무기명 건의사항 소통함 운영 &amp; 답변 (v1.44 신규)</a:t>
             </a:r>
           </a:p>
           <a:p>
@@ -3287,7 +3290,7 @@
               </a:defRPr>
             </a:pPr>
             <a:r>
-              <a:t>모바일 접속 QR 배포 &amp; 외부망 원격 터널링</a:t>
+              <a:t>사원 무기명 건의사항 소통함 운영 및 공식 피드백 관리</a:t>
             </a:r>
           </a:p>
           <a:p>
@@ -3299,7 +3302,7 @@
               </a:defRPr>
             </a:pPr>
             <a:r>
-              <a:t>사내 인원들이 외부망(LTE/5G/자택)에서도 원활히 접속할 수 있도록 QR과 URL을 관리합니다.</a:t>
+              <a:t>100% 무기명으로 접수된 사원 건의사항을 검토하고 조치 상태와 공식 답변을 피드백합니다.</a:t>
             </a:r>
           </a:p>
         </p:txBody>
@@ -3382,7 +3385,7 @@
               </a:defRPr>
             </a:pPr>
             <a:r>
-              <a:t>운영 안내 01</a:t>
+              <a:t>운영 원칙 01</a:t>
             </a:r>
           </a:p>
           <a:p>
@@ -3397,22 +3400,30 @@
               </a:defRPr>
             </a:pPr>
             <a:r>
-              <a:t>1. 사내 모바일 접속 QR</a:t>
+              <a:t>1. 실시간 무기명 접수 모니터링</a:t>
             </a:r>
           </a:p>
           <a:p>
             <a:pPr>
               <a:lnSpc>
-                <a:spcPct val="130000"/>
+                <a:spcPct val="135000"/>
               </a:lnSpc>
-              <a:defRPr sz="1300">
+              <a:defRPr sz="1250">
                 <a:solidFill>
                   <a:srgbClr val="0F172A"/>
                 </a:solidFill>
               </a:defRPr>
             </a:pPr>
             <a:r>
-              <a:t>상단 [📱 모바일 접속 QR]을 띄워 회의실이나 현장에서 직원들이 스마트폰으로 바로 접속할 수 있게 안내합니다.</a:t>
+              <a:t>• 화면 우측 상단 [💡 건의사항 소통함]을 클릭해 사원들이 남긴 건의사항을 확인합니다.</a:t>
+            </a:r>
+            <a:br/>
+            <a:r>
+              <a:t>• 사번/성명 없는 100% 무기명 원칙으로 사원들이 진솔한 의견을 개진할 수 있습니다.</a:t>
+            </a:r>
+            <a:br/>
+            <a:r>
+              <a:t>• 분류(시스템개선, 버그신고, 근무환경 등)별로 정리되어 현안 파악이 용이합니다.</a:t>
             </a:r>
           </a:p>
         </p:txBody>
@@ -3495,7 +3506,7 @@
               </a:defRPr>
             </a:pPr>
             <a:r>
-              <a:t>운영 안내 02</a:t>
+              <a:t>운영 원칙 02</a:t>
             </a:r>
           </a:p>
           <a:p>
@@ -3510,22 +3521,30 @@
               </a:defRPr>
             </a:pPr>
             <a:r>
-              <a:t>2. 외부망 전용 URL QR 생성</a:t>
+              <a:t>2. 조치 상태 변경 &amp; 공식 답변 등록</a:t>
             </a:r>
           </a:p>
           <a:p>
             <a:pPr>
               <a:lnSpc>
-                <a:spcPct val="130000"/>
+                <a:spcPct val="135000"/>
               </a:lnSpc>
-              <a:defRPr sz="1300">
+              <a:defRPr sz="1250">
                 <a:solidFill>
                   <a:srgbClr val="0F172A"/>
                 </a:solidFill>
               </a:defRPr>
             </a:pPr>
             <a:r>
-              <a:t>Cloudflare 등 외부 접속 주소가 변경될 경우 팝업에서 즉시 새 주소를 입력하여 전용 QR 코드를 생성합니다.</a:t>
+              <a:t>• 관리자 로그인 상태에서는 각 건의 카드 하단에 [답변 작성] 버튼이 활성화됩니다.</a:t>
+            </a:r>
+            <a:br/>
+            <a:r>
+              <a:t>• 조치 상태(접수완료, 검토중, 처리완료, 보류)를 선택하고 공식 답변 내용을 입력 후 등록합니다.</a:t>
+            </a:r>
+            <a:br/>
+            <a:r>
+              <a:t>• 등록된 답변은 즉시 사원들에게 공유되어 조직 소통 만족도를 극대화합니다.</a:t>
             </a:r>
           </a:p>
         </p:txBody>
@@ -3608,7 +3627,7 @@
               </a:defRPr>
             </a:pPr>
             <a:r>
-              <a:t>운영 안내 03</a:t>
+              <a:t>운영 원칙 03</a:t>
             </a:r>
           </a:p>
           <a:p>
@@ -3623,22 +3642,26 @@
               </a:defRPr>
             </a:pPr>
             <a:r>
-              <a:t>3. 상시 백그라운드 구동</a:t>
+              <a:t>3. 건전한 게시판 유지 관리</a:t>
             </a:r>
           </a:p>
           <a:p>
             <a:pPr>
               <a:lnSpc>
-                <a:spcPct val="130000"/>
+                <a:spcPct val="135000"/>
               </a:lnSpc>
-              <a:defRPr sz="1300">
+              <a:defRPr sz="1250">
                 <a:solidFill>
                   <a:srgbClr val="0F172A"/>
                 </a:solidFill>
               </a:defRPr>
             </a:pPr>
             <a:r>
-              <a:t>서버 프로세스가 백그라운드에서 상시 유지되어 언제 어디서나 접속 및 데이터 동기화가 유지됩니다.</a:t>
+              <a:t>• 중복 등록되거나 부적절한 게시글은 관리자 전용 [삭제] 버튼으로 안전하게 정비 가능합니다.</a:t>
+            </a:r>
+            <a:br/>
+            <a:r>
+              <a:t>• 사원들의 건의를 바탕으로 시스템 기능 개선 로드맵을 수립할 수 있습니다.</a:t>
             </a:r>
           </a:p>
         </p:txBody>
@@ -3691,7 +3714,7 @@
               </a:defRPr>
             </a:pPr>
             <a:r>
-              <a:t>SUMMARY &amp; Q&amp;A  |  관리자 전용 질문 답변</a:t>
+              <a:t>STEP 10  |  관리자 전용 웹 데이터 스냅샷 백업 &amp; 복원</a:t>
             </a:r>
           </a:p>
           <a:p>
@@ -3703,7 +3726,7 @@
               </a:defRPr>
             </a:pPr>
             <a:r>
-              <a:t>자주 묻는 질문(Q&amp;A)과 관리자 운영 꿀팁 총정리 (v1.43)</a:t>
+              <a:t>💾 웹 저장(스냅샷 백업) 및 📂 웹 열기(원클릭 복원)</a:t>
             </a:r>
           </a:p>
           <a:p>
@@ -3715,7 +3738,7 @@
               </a:defRPr>
             </a:pPr>
             <a:r>
-              <a:t>궁금한 사항이 있으실 때는 언제든 상단의 [📖 관리자 매뉴얼]을 다운로드하여 확인하세요.</a:t>
+              <a:t>사원 화면에서는 숨겨져 관리자만 전담 제어하며, 전체 DB를 안전한 JSON 스냅샷으로 영구 보존합니다.</a:t>
             </a:r>
           </a:p>
         </p:txBody>
@@ -3728,8 +3751,1256 @@
         </p:nvSpPr>
         <p:spPr>
           <a:xfrm>
-            <a:off x="731520" y="1554480"/>
-            <a:ext cx="10728655" cy="868680"/>
+            <a:off x="731520" y="1645920"/>
+            <a:ext cx="3383280" cy="4389120"/>
+          </a:xfrm>
+          <a:prstGeom prst="roundRect">
+            <a:avLst/>
+          </a:prstGeom>
+          <a:solidFill>
+            <a:srgbClr val="FFFFFF"/>
+          </a:solidFill>
+          <a:ln w="25400">
+            <a:solidFill>
+              <a:srgbClr val="CBD5E1"/>
+            </a:solidFill>
+          </a:ln>
+        </p:spPr>
+        <p:style>
+          <a:lnRef idx="1">
+            <a:schemeClr val="accent1"/>
+          </a:lnRef>
+          <a:fillRef idx="3">
+            <a:schemeClr val="accent1"/>
+          </a:fillRef>
+          <a:effectRef idx="2">
+            <a:schemeClr val="accent1"/>
+          </a:effectRef>
+          <a:fontRef idx="minor">
+            <a:schemeClr val="lt1"/>
+          </a:fontRef>
+        </p:style>
+        <p:txBody>
+          <a:bodyPr rtlCol="0" anchor="ctr"/>
+          <a:lstStyle/>
+          <a:p>
+            <a:pPr algn="ctr"/>
+          </a:p>
+        </p:txBody>
+      </p:sp>
+      <p:sp>
+        <p:nvSpPr>
+          <p:cNvPr id="4" name="TextBox 3"/>
+          <p:cNvSpPr txBox="1"/>
+          <p:nvPr/>
+        </p:nvSpPr>
+        <p:spPr>
+          <a:xfrm>
+            <a:off x="914400" y="1828800"/>
+            <a:ext cx="3017520" cy="3931920"/>
+          </a:xfrm>
+          <a:prstGeom prst="rect">
+            <a:avLst/>
+          </a:prstGeom>
+          <a:noFill/>
+        </p:spPr>
+        <p:txBody>
+          <a:bodyPr wrap="square">
+            <a:spAutoFit/>
+          </a:bodyPr>
+          <a:lstStyle/>
+          <a:p>
+            <a:pPr>
+              <a:spcAft>
+                <a:spcPts val="800"/>
+              </a:spcAft>
+              <a:defRPr sz="1200" b="1">
+                <a:solidFill>
+                  <a:srgbClr val="EA580C"/>
+                </a:solidFill>
+              </a:defRPr>
+            </a:pPr>
+            <a:r>
+              <a:t>백업 관리 01</a:t>
+            </a:r>
+          </a:p>
+          <a:p>
+            <a:pPr>
+              <a:spcAft>
+                <a:spcPts val="1400"/>
+              </a:spcAft>
+              <a:defRPr sz="1800" b="1">
+                <a:solidFill>
+                  <a:srgbClr val="1E3A8A"/>
+                </a:solidFill>
+              </a:defRPr>
+            </a:pPr>
+            <a:r>
+              <a:t>1. 💾 신규 웹 스냅샷 저장</a:t>
+            </a:r>
+          </a:p>
+          <a:p>
+            <a:pPr>
+              <a:lnSpc>
+                <a:spcPct val="130000"/>
+              </a:lnSpc>
+              <a:defRPr sz="1300">
+                <a:solidFill>
+                  <a:srgbClr val="0F172A"/>
+                </a:solidFill>
+              </a:defRPr>
+            </a:pPr>
+            <a:r>
+              <a:t>전체 팀원 명부, 소속팀 목록, 특근 신청 및 이력 데이터를 안전한 JSON 파일로 서버에 즉시 보관합니다.</a:t>
+            </a:r>
+          </a:p>
+        </p:txBody>
+      </p:sp>
+      <p:sp>
+        <p:nvSpPr>
+          <p:cNvPr id="5" name="Rounded Rectangle 4"/>
+          <p:cNvSpPr/>
+          <p:nvPr/>
+        </p:nvSpPr>
+        <p:spPr>
+          <a:xfrm>
+            <a:off x="4389120" y="1645920"/>
+            <a:ext cx="3383280" cy="4389120"/>
+          </a:xfrm>
+          <a:prstGeom prst="roundRect">
+            <a:avLst/>
+          </a:prstGeom>
+          <a:solidFill>
+            <a:srgbClr val="FFFFFF"/>
+          </a:solidFill>
+          <a:ln w="25400">
+            <a:solidFill>
+              <a:srgbClr val="CBD5E1"/>
+            </a:solidFill>
+          </a:ln>
+        </p:spPr>
+        <p:style>
+          <a:lnRef idx="1">
+            <a:schemeClr val="accent1"/>
+          </a:lnRef>
+          <a:fillRef idx="3">
+            <a:schemeClr val="accent1"/>
+          </a:fillRef>
+          <a:effectRef idx="2">
+            <a:schemeClr val="accent1"/>
+          </a:effectRef>
+          <a:fontRef idx="minor">
+            <a:schemeClr val="lt1"/>
+          </a:fontRef>
+        </p:style>
+        <p:txBody>
+          <a:bodyPr rtlCol="0" anchor="ctr"/>
+          <a:lstStyle/>
+          <a:p>
+            <a:pPr algn="ctr"/>
+          </a:p>
+        </p:txBody>
+      </p:sp>
+      <p:sp>
+        <p:nvSpPr>
+          <p:cNvPr id="6" name="TextBox 5"/>
+          <p:cNvSpPr txBox="1"/>
+          <p:nvPr/>
+        </p:nvSpPr>
+        <p:spPr>
+          <a:xfrm>
+            <a:off x="4572000" y="1828800"/>
+            <a:ext cx="3017520" cy="3931920"/>
+          </a:xfrm>
+          <a:prstGeom prst="rect">
+            <a:avLst/>
+          </a:prstGeom>
+          <a:noFill/>
+        </p:spPr>
+        <p:txBody>
+          <a:bodyPr wrap="square">
+            <a:spAutoFit/>
+          </a:bodyPr>
+          <a:lstStyle/>
+          <a:p>
+            <a:pPr>
+              <a:spcAft>
+                <a:spcPts val="800"/>
+              </a:spcAft>
+              <a:defRPr sz="1200" b="1">
+                <a:solidFill>
+                  <a:srgbClr val="EA580C"/>
+                </a:solidFill>
+              </a:defRPr>
+            </a:pPr>
+            <a:r>
+              <a:t>백업 관리 02</a:t>
+            </a:r>
+          </a:p>
+          <a:p>
+            <a:pPr>
+              <a:spcAft>
+                <a:spcPts val="1400"/>
+              </a:spcAft>
+              <a:defRPr sz="1800" b="1">
+                <a:solidFill>
+                  <a:srgbClr val="1E3A8A"/>
+                </a:solidFill>
+              </a:defRPr>
+            </a:pPr>
+            <a:r>
+              <a:t>2. 📂 저장된 스냅샷 원클릭 복원</a:t>
+            </a:r>
+          </a:p>
+          <a:p>
+            <a:pPr>
+              <a:lnSpc>
+                <a:spcPct val="130000"/>
+              </a:lnSpc>
+              <a:defRPr sz="1300">
+                <a:solidFill>
+                  <a:srgbClr val="0F172A"/>
+                </a:solidFill>
+              </a:defRPr>
+            </a:pPr>
+            <a:r>
+              <a:t>저장된 백업 목록에서 원하는 시점의 [열기] 버튼을 누르면 해당 시점의 데이터로 1초 만에 안전 복원됩니다.</a:t>
+            </a:r>
+          </a:p>
+        </p:txBody>
+      </p:sp>
+      <p:sp>
+        <p:nvSpPr>
+          <p:cNvPr id="7" name="Rounded Rectangle 6"/>
+          <p:cNvSpPr/>
+          <p:nvPr/>
+        </p:nvSpPr>
+        <p:spPr>
+          <a:xfrm>
+            <a:off x="8046720" y="1645920"/>
+            <a:ext cx="3383280" cy="4389120"/>
+          </a:xfrm>
+          <a:prstGeom prst="roundRect">
+            <a:avLst/>
+          </a:prstGeom>
+          <a:solidFill>
+            <a:srgbClr val="FFFFFF"/>
+          </a:solidFill>
+          <a:ln w="25400">
+            <a:solidFill>
+              <a:srgbClr val="CBD5E1"/>
+            </a:solidFill>
+          </a:ln>
+        </p:spPr>
+        <p:style>
+          <a:lnRef idx="1">
+            <a:schemeClr val="accent1"/>
+          </a:lnRef>
+          <a:fillRef idx="3">
+            <a:schemeClr val="accent1"/>
+          </a:fillRef>
+          <a:effectRef idx="2">
+            <a:schemeClr val="accent1"/>
+          </a:effectRef>
+          <a:fontRef idx="minor">
+            <a:schemeClr val="lt1"/>
+          </a:fontRef>
+        </p:style>
+        <p:txBody>
+          <a:bodyPr rtlCol="0" anchor="ctr"/>
+          <a:lstStyle/>
+          <a:p>
+            <a:pPr algn="ctr"/>
+          </a:p>
+        </p:txBody>
+      </p:sp>
+      <p:sp>
+        <p:nvSpPr>
+          <p:cNvPr id="8" name="TextBox 7"/>
+          <p:cNvSpPr txBox="1"/>
+          <p:nvPr/>
+        </p:nvSpPr>
+        <p:spPr>
+          <a:xfrm>
+            <a:off x="8229600" y="1828800"/>
+            <a:ext cx="3017520" cy="3931920"/>
+          </a:xfrm>
+          <a:prstGeom prst="rect">
+            <a:avLst/>
+          </a:prstGeom>
+          <a:noFill/>
+        </p:spPr>
+        <p:txBody>
+          <a:bodyPr wrap="square">
+            <a:spAutoFit/>
+          </a:bodyPr>
+          <a:lstStyle/>
+          <a:p>
+            <a:pPr>
+              <a:spcAft>
+                <a:spcPts val="800"/>
+              </a:spcAft>
+              <a:defRPr sz="1200" b="1">
+                <a:solidFill>
+                  <a:srgbClr val="EA580C"/>
+                </a:solidFill>
+              </a:defRPr>
+            </a:pPr>
+            <a:r>
+              <a:t>백업 관리 03</a:t>
+            </a:r>
+          </a:p>
+          <a:p>
+            <a:pPr>
+              <a:spcAft>
+                <a:spcPts val="1400"/>
+              </a:spcAft>
+              <a:defRPr sz="1800" b="1">
+                <a:solidFill>
+                  <a:srgbClr val="1E3A8A"/>
+                </a:solidFill>
+              </a:defRPr>
+            </a:pPr>
+            <a:r>
+              <a:t>3. 자동 안전 보조백업 생성</a:t>
+            </a:r>
+          </a:p>
+          <a:p>
+            <a:pPr>
+              <a:lnSpc>
+                <a:spcPct val="130000"/>
+              </a:lnSpc>
+              <a:defRPr sz="1300">
+                <a:solidFill>
+                  <a:srgbClr val="0F172A"/>
+                </a:solidFill>
+              </a:defRPr>
+            </a:pPr>
+            <a:r>
+              <a:t>복원 실행 시 현재 데이터가 사라지지 않도록 직전 상태의 보조 백업을 자동 생성하여 무소실을 보장합니다.</a:t>
+            </a:r>
+          </a:p>
+        </p:txBody>
+      </p:sp>
+    </p:spTree>
+  </p:cSld>
+  <p:clrMapOvr>
+    <a:masterClrMapping/>
+  </p:clrMapOvr>
+</p:sld>
+</file>
+
+<file path=ppt/slides/slide12.xml><?xml version="1.0" encoding="utf-8"?>
+<p:sld xmlns:a="http://schemas.openxmlformats.org/drawingml/2006/main" xmlns:p="http://schemas.openxmlformats.org/presentationml/2006/main" xmlns:r="http://schemas.openxmlformats.org/officeDocument/2006/relationships">
+  <p:cSld>
+    <p:spTree>
+      <p:nvGrpSpPr>
+        <p:cNvPr id="1" name=""/>
+        <p:cNvGrpSpPr/>
+        <p:nvPr/>
+      </p:nvGrpSpPr>
+      <p:grpSpPr/>
+      <p:sp>
+        <p:nvSpPr>
+          <p:cNvPr id="2" name="TextBox 1"/>
+          <p:cNvSpPr txBox="1"/>
+          <p:nvPr/>
+        </p:nvSpPr>
+        <p:spPr>
+          <a:xfrm>
+            <a:off x="731520" y="365760"/>
+            <a:ext cx="10698480" cy="1005840"/>
+          </a:xfrm>
+          <a:prstGeom prst="rect">
+            <a:avLst/>
+          </a:prstGeom>
+          <a:noFill/>
+        </p:spPr>
+        <p:txBody>
+          <a:bodyPr wrap="square">
+            <a:spAutoFit/>
+          </a:bodyPr>
+          <a:lstStyle/>
+          <a:p>
+            <a:pPr>
+              <a:defRPr sz="1200" b="1">
+                <a:solidFill>
+                  <a:srgbClr val="EA580C"/>
+                </a:solidFill>
+              </a:defRPr>
+            </a:pPr>
+            <a:r>
+              <a:t>STEP 11  |  슈퍼관리자 전용 시스템 보안 및 접속 감사 로그</a:t>
+            </a:r>
+          </a:p>
+          <a:p>
+            <a:pPr>
+              <a:defRPr sz="2200" b="1">
+                <a:solidFill>
+                  <a:srgbClr val="1E3A8A"/>
+                </a:solidFill>
+              </a:defRPr>
+            </a:pPr>
+            <a:r>
+              <a:t>🛡️ 시스템 보안 및 사용자 접속 감사 로그 관리</a:t>
+            </a:r>
+          </a:p>
+          <a:p>
+            <a:pPr>
+              <a:defRPr sz="1300">
+                <a:solidFill>
+                  <a:srgbClr val="64748B"/>
+                </a:solidFill>
+              </a:defRPr>
+            </a:pPr>
+            <a:r>
+              <a:t>사원 로그인 시도(성공/실패), 신규 사원 등록, IP 주소 및 기기(User-Agent) 이력을 실시간 감사·추적합니다.</a:t>
+            </a:r>
+          </a:p>
+        </p:txBody>
+      </p:sp>
+      <p:sp>
+        <p:nvSpPr>
+          <p:cNvPr id="3" name="Rounded Rectangle 2"/>
+          <p:cNvSpPr/>
+          <p:nvPr/>
+        </p:nvSpPr>
+        <p:spPr>
+          <a:xfrm>
+            <a:off x="731520" y="1645920"/>
+            <a:ext cx="3383280" cy="4389120"/>
+          </a:xfrm>
+          <a:prstGeom prst="roundRect">
+            <a:avLst/>
+          </a:prstGeom>
+          <a:solidFill>
+            <a:srgbClr val="FFFFFF"/>
+          </a:solidFill>
+          <a:ln w="25400">
+            <a:solidFill>
+              <a:srgbClr val="CBD5E1"/>
+            </a:solidFill>
+          </a:ln>
+        </p:spPr>
+        <p:style>
+          <a:lnRef idx="1">
+            <a:schemeClr val="accent1"/>
+          </a:lnRef>
+          <a:fillRef idx="3">
+            <a:schemeClr val="accent1"/>
+          </a:fillRef>
+          <a:effectRef idx="2">
+            <a:schemeClr val="accent1"/>
+          </a:effectRef>
+          <a:fontRef idx="minor">
+            <a:schemeClr val="lt1"/>
+          </a:fontRef>
+        </p:style>
+        <p:txBody>
+          <a:bodyPr rtlCol="0" anchor="ctr"/>
+          <a:lstStyle/>
+          <a:p>
+            <a:pPr algn="ctr"/>
+          </a:p>
+        </p:txBody>
+      </p:sp>
+      <p:sp>
+        <p:nvSpPr>
+          <p:cNvPr id="4" name="TextBox 3"/>
+          <p:cNvSpPr txBox="1"/>
+          <p:nvPr/>
+        </p:nvSpPr>
+        <p:spPr>
+          <a:xfrm>
+            <a:off x="914400" y="1828800"/>
+            <a:ext cx="3017520" cy="3931920"/>
+          </a:xfrm>
+          <a:prstGeom prst="rect">
+            <a:avLst/>
+          </a:prstGeom>
+          <a:noFill/>
+        </p:spPr>
+        <p:txBody>
+          <a:bodyPr wrap="square">
+            <a:spAutoFit/>
+          </a:bodyPr>
+          <a:lstStyle/>
+          <a:p>
+            <a:pPr>
+              <a:spcAft>
+                <a:spcPts val="800"/>
+              </a:spcAft>
+              <a:defRPr sz="1200" b="1">
+                <a:solidFill>
+                  <a:srgbClr val="EA580C"/>
+                </a:solidFill>
+              </a:defRPr>
+            </a:pPr>
+            <a:r>
+              <a:t>보안 체계 01</a:t>
+            </a:r>
+          </a:p>
+          <a:p>
+            <a:pPr>
+              <a:spcAft>
+                <a:spcPts val="1400"/>
+              </a:spcAft>
+              <a:defRPr sz="1800" b="1">
+                <a:solidFill>
+                  <a:srgbClr val="1E3A8A"/>
+                </a:solidFill>
+              </a:defRPr>
+            </a:pPr>
+            <a:r>
+              <a:t>1. 실시간 접속/보안 감사 추적</a:t>
+            </a:r>
+          </a:p>
+          <a:p>
+            <a:pPr>
+              <a:lnSpc>
+                <a:spcPct val="130000"/>
+              </a:lnSpc>
+              <a:defRPr sz="1300">
+                <a:solidFill>
+                  <a:srgbClr val="0F172A"/>
+                </a:solidFill>
+              </a:defRPr>
+            </a:pPr>
+            <a:r>
+              <a:t>로그인 시도 성공/실패, 미등록 사번 접근 시도, 신규 사원 등록, 로그아웃 이력이 초단위로 영구 기록됩니다.</a:t>
+            </a:r>
+          </a:p>
+        </p:txBody>
+      </p:sp>
+      <p:sp>
+        <p:nvSpPr>
+          <p:cNvPr id="5" name="Rounded Rectangle 4"/>
+          <p:cNvSpPr/>
+          <p:nvPr/>
+        </p:nvSpPr>
+        <p:spPr>
+          <a:xfrm>
+            <a:off x="4389120" y="1645920"/>
+            <a:ext cx="3383280" cy="4389120"/>
+          </a:xfrm>
+          <a:prstGeom prst="roundRect">
+            <a:avLst/>
+          </a:prstGeom>
+          <a:solidFill>
+            <a:srgbClr val="FFFFFF"/>
+          </a:solidFill>
+          <a:ln w="25400">
+            <a:solidFill>
+              <a:srgbClr val="CBD5E1"/>
+            </a:solidFill>
+          </a:ln>
+        </p:spPr>
+        <p:style>
+          <a:lnRef idx="1">
+            <a:schemeClr val="accent1"/>
+          </a:lnRef>
+          <a:fillRef idx="3">
+            <a:schemeClr val="accent1"/>
+          </a:fillRef>
+          <a:effectRef idx="2">
+            <a:schemeClr val="accent1"/>
+          </a:effectRef>
+          <a:fontRef idx="minor">
+            <a:schemeClr val="lt1"/>
+          </a:fontRef>
+        </p:style>
+        <p:txBody>
+          <a:bodyPr rtlCol="0" anchor="ctr"/>
+          <a:lstStyle/>
+          <a:p>
+            <a:pPr algn="ctr"/>
+          </a:p>
+        </p:txBody>
+      </p:sp>
+      <p:sp>
+        <p:nvSpPr>
+          <p:cNvPr id="6" name="TextBox 5"/>
+          <p:cNvSpPr txBox="1"/>
+          <p:nvPr/>
+        </p:nvSpPr>
+        <p:spPr>
+          <a:xfrm>
+            <a:off x="4572000" y="1828800"/>
+            <a:ext cx="3017520" cy="3931920"/>
+          </a:xfrm>
+          <a:prstGeom prst="rect">
+            <a:avLst/>
+          </a:prstGeom>
+          <a:noFill/>
+        </p:spPr>
+        <p:txBody>
+          <a:bodyPr wrap="square">
+            <a:spAutoFit/>
+          </a:bodyPr>
+          <a:lstStyle/>
+          <a:p>
+            <a:pPr>
+              <a:spcAft>
+                <a:spcPts val="800"/>
+              </a:spcAft>
+              <a:defRPr sz="1200" b="1">
+                <a:solidFill>
+                  <a:srgbClr val="EA580C"/>
+                </a:solidFill>
+              </a:defRPr>
+            </a:pPr>
+            <a:r>
+              <a:t>보안 체계 02</a:t>
+            </a:r>
+          </a:p>
+          <a:p>
+            <a:pPr>
+              <a:spcAft>
+                <a:spcPts val="1400"/>
+              </a:spcAft>
+              <a:defRPr sz="1800" b="1">
+                <a:solidFill>
+                  <a:srgbClr val="1E3A8A"/>
+                </a:solidFill>
+              </a:defRPr>
+            </a:pPr>
+            <a:r>
+              <a:t>2. 다차원 필터링 &amp; 판독 용이성</a:t>
+            </a:r>
+          </a:p>
+          <a:p>
+            <a:pPr>
+              <a:lnSpc>
+                <a:spcPct val="130000"/>
+              </a:lnSpc>
+              <a:defRPr sz="1300">
+                <a:solidFill>
+                  <a:srgbClr val="0F172A"/>
+                </a:solidFill>
+              </a:defRPr>
+            </a:pPr>
+            <a:r>
+              <a:t>기간(시작~종료), 액션 구분(LOGIN/REGISTER/LOGOUT), 상태(성공/실패), 사번/성명/IP 검색으로 비정상 접속을 1초 만에 식별합니다.</a:t>
+            </a:r>
+          </a:p>
+        </p:txBody>
+      </p:sp>
+      <p:sp>
+        <p:nvSpPr>
+          <p:cNvPr id="7" name="Rounded Rectangle 6"/>
+          <p:cNvSpPr/>
+          <p:nvPr/>
+        </p:nvSpPr>
+        <p:spPr>
+          <a:xfrm>
+            <a:off x="8046720" y="1645920"/>
+            <a:ext cx="3383280" cy="4389120"/>
+          </a:xfrm>
+          <a:prstGeom prst="roundRect">
+            <a:avLst/>
+          </a:prstGeom>
+          <a:solidFill>
+            <a:srgbClr val="FFFFFF"/>
+          </a:solidFill>
+          <a:ln w="25400">
+            <a:solidFill>
+              <a:srgbClr val="CBD5E1"/>
+            </a:solidFill>
+          </a:ln>
+        </p:spPr>
+        <p:style>
+          <a:lnRef idx="1">
+            <a:schemeClr val="accent1"/>
+          </a:lnRef>
+          <a:fillRef idx="3">
+            <a:schemeClr val="accent1"/>
+          </a:fillRef>
+          <a:effectRef idx="2">
+            <a:schemeClr val="accent1"/>
+          </a:effectRef>
+          <a:fontRef idx="minor">
+            <a:schemeClr val="lt1"/>
+          </a:fontRef>
+        </p:style>
+        <p:txBody>
+          <a:bodyPr rtlCol="0" anchor="ctr"/>
+          <a:lstStyle/>
+          <a:p>
+            <a:pPr algn="ctr"/>
+          </a:p>
+        </p:txBody>
+      </p:sp>
+      <p:sp>
+        <p:nvSpPr>
+          <p:cNvPr id="8" name="TextBox 7"/>
+          <p:cNvSpPr txBox="1"/>
+          <p:nvPr/>
+        </p:nvSpPr>
+        <p:spPr>
+          <a:xfrm>
+            <a:off x="8229600" y="1828800"/>
+            <a:ext cx="3017520" cy="3931920"/>
+          </a:xfrm>
+          <a:prstGeom prst="rect">
+            <a:avLst/>
+          </a:prstGeom>
+          <a:noFill/>
+        </p:spPr>
+        <p:txBody>
+          <a:bodyPr wrap="square">
+            <a:spAutoFit/>
+          </a:bodyPr>
+          <a:lstStyle/>
+          <a:p>
+            <a:pPr>
+              <a:spcAft>
+                <a:spcPts val="800"/>
+              </a:spcAft>
+              <a:defRPr sz="1200" b="1">
+                <a:solidFill>
+                  <a:srgbClr val="EA580C"/>
+                </a:solidFill>
+              </a:defRPr>
+            </a:pPr>
+            <a:r>
+              <a:t>보안 체계 03</a:t>
+            </a:r>
+          </a:p>
+          <a:p>
+            <a:pPr>
+              <a:spcAft>
+                <a:spcPts val="1400"/>
+              </a:spcAft>
+              <a:defRPr sz="1800" b="1">
+                <a:solidFill>
+                  <a:srgbClr val="1E3A8A"/>
+                </a:solidFill>
+              </a:defRPr>
+            </a:pPr>
+            <a:r>
+              <a:t>3. 서식화된 엑셀(.xlsx) 내보내기</a:t>
+            </a:r>
+          </a:p>
+          <a:p>
+            <a:pPr>
+              <a:lnSpc>
+                <a:spcPct val="130000"/>
+              </a:lnSpc>
+              <a:defRPr sz="1300">
+                <a:solidFill>
+                  <a:srgbClr val="0F172A"/>
+                </a:solidFill>
+              </a:defRPr>
+            </a:pPr>
+            <a:r>
+              <a:t>openpyxl 기반 컬러 배지(성공: 연녹색, 실패: 연빨강)가 적용된 감사 보고서 엑셀 파일을 원클릭으로 즉시 다운로드합니다.</a:t>
+            </a:r>
+          </a:p>
+        </p:txBody>
+      </p:sp>
+    </p:spTree>
+  </p:cSld>
+  <p:clrMapOvr>
+    <a:masterClrMapping/>
+  </p:clrMapOvr>
+</p:sld>
+</file>
+
+<file path=ppt/slides/slide13.xml><?xml version="1.0" encoding="utf-8"?>
+<p:sld xmlns:a="http://schemas.openxmlformats.org/drawingml/2006/main" xmlns:p="http://schemas.openxmlformats.org/presentationml/2006/main" xmlns:r="http://schemas.openxmlformats.org/officeDocument/2006/relationships">
+  <p:cSld>
+    <p:spTree>
+      <p:nvGrpSpPr>
+        <p:cNvPr id="1" name=""/>
+        <p:cNvGrpSpPr/>
+        <p:nvPr/>
+      </p:nvGrpSpPr>
+      <p:grpSpPr/>
+      <p:sp>
+        <p:nvSpPr>
+          <p:cNvPr id="2" name="TextBox 1"/>
+          <p:cNvSpPr txBox="1"/>
+          <p:nvPr/>
+        </p:nvSpPr>
+        <p:spPr>
+          <a:xfrm>
+            <a:off x="731520" y="365760"/>
+            <a:ext cx="10698480" cy="1005840"/>
+          </a:xfrm>
+          <a:prstGeom prst="rect">
+            <a:avLst/>
+          </a:prstGeom>
+          <a:noFill/>
+        </p:spPr>
+        <p:txBody>
+          <a:bodyPr wrap="square">
+            <a:spAutoFit/>
+          </a:bodyPr>
+          <a:lstStyle/>
+          <a:p>
+            <a:pPr>
+              <a:defRPr sz="1200" b="1">
+                <a:solidFill>
+                  <a:srgbClr val="EA580C"/>
+                </a:solidFill>
+              </a:defRPr>
+            </a:pPr>
+            <a:r>
+              <a:t>STEP 12  |  스마트폰 모바일 및 외부망 접속 관리</a:t>
+            </a:r>
+          </a:p>
+          <a:p>
+            <a:pPr>
+              <a:defRPr sz="2200" b="1">
+                <a:solidFill>
+                  <a:srgbClr val="1E3A8A"/>
+                </a:solidFill>
+              </a:defRPr>
+            </a:pPr>
+            <a:r>
+              <a:t>모바일 접속 QR 배포 &amp; 외부망 원격 터널링</a:t>
+            </a:r>
+          </a:p>
+          <a:p>
+            <a:pPr>
+              <a:defRPr sz="1300">
+                <a:solidFill>
+                  <a:srgbClr val="64748B"/>
+                </a:solidFill>
+              </a:defRPr>
+            </a:pPr>
+            <a:r>
+              <a:t>사내 인원들이 외부망(LTE/5G/자택)에서도 원활히 접속할 수 있도록 QR과 URL을 관리합니다.</a:t>
+            </a:r>
+          </a:p>
+        </p:txBody>
+      </p:sp>
+      <p:sp>
+        <p:nvSpPr>
+          <p:cNvPr id="3" name="Rounded Rectangle 2"/>
+          <p:cNvSpPr/>
+          <p:nvPr/>
+        </p:nvSpPr>
+        <p:spPr>
+          <a:xfrm>
+            <a:off x="731520" y="1645920"/>
+            <a:ext cx="3383280" cy="4389120"/>
+          </a:xfrm>
+          <a:prstGeom prst="roundRect">
+            <a:avLst/>
+          </a:prstGeom>
+          <a:solidFill>
+            <a:srgbClr val="FFFFFF"/>
+          </a:solidFill>
+          <a:ln w="25400">
+            <a:solidFill>
+              <a:srgbClr val="CBD5E1"/>
+            </a:solidFill>
+          </a:ln>
+        </p:spPr>
+        <p:style>
+          <a:lnRef idx="1">
+            <a:schemeClr val="accent1"/>
+          </a:lnRef>
+          <a:fillRef idx="3">
+            <a:schemeClr val="accent1"/>
+          </a:fillRef>
+          <a:effectRef idx="2">
+            <a:schemeClr val="accent1"/>
+          </a:effectRef>
+          <a:fontRef idx="minor">
+            <a:schemeClr val="lt1"/>
+          </a:fontRef>
+        </p:style>
+        <p:txBody>
+          <a:bodyPr rtlCol="0" anchor="ctr"/>
+          <a:lstStyle/>
+          <a:p>
+            <a:pPr algn="ctr"/>
+          </a:p>
+        </p:txBody>
+      </p:sp>
+      <p:sp>
+        <p:nvSpPr>
+          <p:cNvPr id="4" name="TextBox 3"/>
+          <p:cNvSpPr txBox="1"/>
+          <p:nvPr/>
+        </p:nvSpPr>
+        <p:spPr>
+          <a:xfrm>
+            <a:off x="914400" y="1828800"/>
+            <a:ext cx="3017520" cy="3931920"/>
+          </a:xfrm>
+          <a:prstGeom prst="rect">
+            <a:avLst/>
+          </a:prstGeom>
+          <a:noFill/>
+        </p:spPr>
+        <p:txBody>
+          <a:bodyPr wrap="square">
+            <a:spAutoFit/>
+          </a:bodyPr>
+          <a:lstStyle/>
+          <a:p>
+            <a:pPr>
+              <a:spcAft>
+                <a:spcPts val="800"/>
+              </a:spcAft>
+              <a:defRPr sz="1200" b="1">
+                <a:solidFill>
+                  <a:srgbClr val="EA580C"/>
+                </a:solidFill>
+              </a:defRPr>
+            </a:pPr>
+            <a:r>
+              <a:t>운영 안내 01</a:t>
+            </a:r>
+          </a:p>
+          <a:p>
+            <a:pPr>
+              <a:spcAft>
+                <a:spcPts val="1400"/>
+              </a:spcAft>
+              <a:defRPr sz="1800" b="1">
+                <a:solidFill>
+                  <a:srgbClr val="1E3A8A"/>
+                </a:solidFill>
+              </a:defRPr>
+            </a:pPr>
+            <a:r>
+              <a:t>1. 외부망 기본 접속 QR 배포</a:t>
+            </a:r>
+          </a:p>
+          <a:p>
+            <a:pPr>
+              <a:lnSpc>
+                <a:spcPct val="130000"/>
+              </a:lnSpc>
+              <a:defRPr sz="1300">
+                <a:solidFill>
+                  <a:srgbClr val="0F172A"/>
+                </a:solidFill>
+              </a:defRPr>
+            </a:pPr>
+            <a:r>
+              <a:t>상단 [📱 모바일 접속 QR]을 띄워 직원들이 스마트폰(LTE/5G)으로 외부망에 즉시 접속할 수 있는 기본 QR 코드를 공유합니다.</a:t>
+            </a:r>
+          </a:p>
+        </p:txBody>
+      </p:sp>
+      <p:sp>
+        <p:nvSpPr>
+          <p:cNvPr id="5" name="Rounded Rectangle 4"/>
+          <p:cNvSpPr/>
+          <p:nvPr/>
+        </p:nvSpPr>
+        <p:spPr>
+          <a:xfrm>
+            <a:off x="4389120" y="1645920"/>
+            <a:ext cx="3383280" cy="4389120"/>
+          </a:xfrm>
+          <a:prstGeom prst="roundRect">
+            <a:avLst/>
+          </a:prstGeom>
+          <a:solidFill>
+            <a:srgbClr val="FFFFFF"/>
+          </a:solidFill>
+          <a:ln w="25400">
+            <a:solidFill>
+              <a:srgbClr val="CBD5E1"/>
+            </a:solidFill>
+          </a:ln>
+        </p:spPr>
+        <p:style>
+          <a:lnRef idx="1">
+            <a:schemeClr val="accent1"/>
+          </a:lnRef>
+          <a:fillRef idx="3">
+            <a:schemeClr val="accent1"/>
+          </a:fillRef>
+          <a:effectRef idx="2">
+            <a:schemeClr val="accent1"/>
+          </a:effectRef>
+          <a:fontRef idx="minor">
+            <a:schemeClr val="lt1"/>
+          </a:fontRef>
+        </p:style>
+        <p:txBody>
+          <a:bodyPr rtlCol="0" anchor="ctr"/>
+          <a:lstStyle/>
+          <a:p>
+            <a:pPr algn="ctr"/>
+          </a:p>
+        </p:txBody>
+      </p:sp>
+      <p:sp>
+        <p:nvSpPr>
+          <p:cNvPr id="6" name="TextBox 5"/>
+          <p:cNvSpPr txBox="1"/>
+          <p:nvPr/>
+        </p:nvSpPr>
+        <p:spPr>
+          <a:xfrm>
+            <a:off x="4572000" y="1828800"/>
+            <a:ext cx="3017520" cy="3931920"/>
+          </a:xfrm>
+          <a:prstGeom prst="rect">
+            <a:avLst/>
+          </a:prstGeom>
+          <a:noFill/>
+        </p:spPr>
+        <p:txBody>
+          <a:bodyPr wrap="square">
+            <a:spAutoFit/>
+          </a:bodyPr>
+          <a:lstStyle/>
+          <a:p>
+            <a:pPr>
+              <a:spcAft>
+                <a:spcPts val="800"/>
+              </a:spcAft>
+              <a:defRPr sz="1200" b="1">
+                <a:solidFill>
+                  <a:srgbClr val="EA580C"/>
+                </a:solidFill>
+              </a:defRPr>
+            </a:pPr>
+            <a:r>
+              <a:t>운영 안내 02</a:t>
+            </a:r>
+          </a:p>
+          <a:p>
+            <a:pPr>
+              <a:spcAft>
+                <a:spcPts val="1400"/>
+              </a:spcAft>
+              <a:defRPr sz="1800" b="1">
+                <a:solidFill>
+                  <a:srgbClr val="1E3A8A"/>
+                </a:solidFill>
+              </a:defRPr>
+            </a:pPr>
+            <a:r>
+              <a:t>2. 외부 도메인 변경 시 원클릭 갱신</a:t>
+            </a:r>
+          </a:p>
+          <a:p>
+            <a:pPr>
+              <a:lnSpc>
+                <a:spcPct val="130000"/>
+              </a:lnSpc>
+              <a:defRPr sz="1300">
+                <a:solidFill>
+                  <a:srgbClr val="0F172A"/>
+                </a:solidFill>
+              </a:defRPr>
+            </a:pPr>
+            <a:r>
+              <a:t>Cloudflare 등 외부 접속 도메인이나 전용 주소가 변경될 경우 팝업에서 새 주소를 입력하고 [QR 갱신]을 눌러 즉시 반영합니다.</a:t>
+            </a:r>
+          </a:p>
+        </p:txBody>
+      </p:sp>
+      <p:sp>
+        <p:nvSpPr>
+          <p:cNvPr id="7" name="Rounded Rectangle 6"/>
+          <p:cNvSpPr/>
+          <p:nvPr/>
+        </p:nvSpPr>
+        <p:spPr>
+          <a:xfrm>
+            <a:off x="8046720" y="1645920"/>
+            <a:ext cx="3383280" cy="4389120"/>
+          </a:xfrm>
+          <a:prstGeom prst="roundRect">
+            <a:avLst/>
+          </a:prstGeom>
+          <a:solidFill>
+            <a:srgbClr val="FFFFFF"/>
+          </a:solidFill>
+          <a:ln w="25400">
+            <a:solidFill>
+              <a:srgbClr val="CBD5E1"/>
+            </a:solidFill>
+          </a:ln>
+        </p:spPr>
+        <p:style>
+          <a:lnRef idx="1">
+            <a:schemeClr val="accent1"/>
+          </a:lnRef>
+          <a:fillRef idx="3">
+            <a:schemeClr val="accent1"/>
+          </a:fillRef>
+          <a:effectRef idx="2">
+            <a:schemeClr val="accent1"/>
+          </a:effectRef>
+          <a:fontRef idx="minor">
+            <a:schemeClr val="lt1"/>
+          </a:fontRef>
+        </p:style>
+        <p:txBody>
+          <a:bodyPr rtlCol="0" anchor="ctr"/>
+          <a:lstStyle/>
+          <a:p>
+            <a:pPr algn="ctr"/>
+          </a:p>
+        </p:txBody>
+      </p:sp>
+      <p:sp>
+        <p:nvSpPr>
+          <p:cNvPr id="8" name="TextBox 7"/>
+          <p:cNvSpPr txBox="1"/>
+          <p:nvPr/>
+        </p:nvSpPr>
+        <p:spPr>
+          <a:xfrm>
+            <a:off x="8229600" y="1828800"/>
+            <a:ext cx="3017520" cy="3931920"/>
+          </a:xfrm>
+          <a:prstGeom prst="rect">
+            <a:avLst/>
+          </a:prstGeom>
+          <a:noFill/>
+        </p:spPr>
+        <p:txBody>
+          <a:bodyPr wrap="square">
+            <a:spAutoFit/>
+          </a:bodyPr>
+          <a:lstStyle/>
+          <a:p>
+            <a:pPr>
+              <a:spcAft>
+                <a:spcPts val="800"/>
+              </a:spcAft>
+              <a:defRPr sz="1200" b="1">
+                <a:solidFill>
+                  <a:srgbClr val="EA580C"/>
+                </a:solidFill>
+              </a:defRPr>
+            </a:pPr>
+            <a:r>
+              <a:t>운영 안내 03</a:t>
+            </a:r>
+          </a:p>
+          <a:p>
+            <a:pPr>
+              <a:spcAft>
+                <a:spcPts val="1400"/>
+              </a:spcAft>
+              <a:defRPr sz="1800" b="1">
+                <a:solidFill>
+                  <a:srgbClr val="1E3A8A"/>
+                </a:solidFill>
+              </a:defRPr>
+            </a:pPr>
+            <a:r>
+              <a:t>3. 24시간 안전 보안 터널 구동</a:t>
+            </a:r>
+          </a:p>
+          <a:p>
+            <a:pPr>
+              <a:lnSpc>
+                <a:spcPct val="130000"/>
+              </a:lnSpc>
+              <a:defRPr sz="1300">
+                <a:solidFill>
+                  <a:srgbClr val="0F172A"/>
+                </a:solidFill>
+              </a:defRPr>
+            </a:pPr>
+            <a:r>
+              <a:t>Cloudflare Tunnel(start_external_access.bat)을 통해 포트포워딩 없이도 외부 접속이 전송 구간 암호화(HTTPS)로 안전 유지됩니다.</a:t>
+            </a:r>
+          </a:p>
+        </p:txBody>
+      </p:sp>
+    </p:spTree>
+  </p:cSld>
+  <p:clrMapOvr>
+    <a:masterClrMapping/>
+  </p:clrMapOvr>
+</p:sld>
+</file>
+
+<file path=ppt/slides/slide14.xml><?xml version="1.0" encoding="utf-8"?>
+<p:sld xmlns:a="http://schemas.openxmlformats.org/drawingml/2006/main" xmlns:p="http://schemas.openxmlformats.org/presentationml/2006/main" xmlns:r="http://schemas.openxmlformats.org/officeDocument/2006/relationships">
+  <p:cSld>
+    <p:spTree>
+      <p:nvGrpSpPr>
+        <p:cNvPr id="1" name=""/>
+        <p:cNvGrpSpPr/>
+        <p:nvPr/>
+      </p:nvGrpSpPr>
+      <p:grpSpPr/>
+      <p:sp>
+        <p:nvSpPr>
+          <p:cNvPr id="2" name="TextBox 1"/>
+          <p:cNvSpPr txBox="1"/>
+          <p:nvPr/>
+        </p:nvSpPr>
+        <p:spPr>
+          <a:xfrm>
+            <a:off x="731520" y="365760"/>
+            <a:ext cx="10698480" cy="1005840"/>
+          </a:xfrm>
+          <a:prstGeom prst="rect">
+            <a:avLst/>
+          </a:prstGeom>
+          <a:noFill/>
+        </p:spPr>
+        <p:txBody>
+          <a:bodyPr wrap="square">
+            <a:spAutoFit/>
+          </a:bodyPr>
+          <a:lstStyle/>
+          <a:p>
+            <a:pPr>
+              <a:defRPr sz="1200" b="1">
+                <a:solidFill>
+                  <a:srgbClr val="EA580C"/>
+                </a:solidFill>
+              </a:defRPr>
+            </a:pPr>
+            <a:r>
+              <a:t>SUMMARY &amp; Q&amp;A  |  관리자 전용 질문 답변</a:t>
+            </a:r>
+          </a:p>
+          <a:p>
+            <a:pPr>
+              <a:defRPr sz="2200" b="1">
+                <a:solidFill>
+                  <a:srgbClr val="1E3A8A"/>
+                </a:solidFill>
+              </a:defRPr>
+            </a:pPr>
+            <a:r>
+              <a:t>자주 묻는 질문(Q&amp;A)과 관리자 운영 꿀팁 총정리 (v1.44)</a:t>
+            </a:r>
+          </a:p>
+          <a:p>
+            <a:pPr>
+              <a:defRPr sz="1300">
+                <a:solidFill>
+                  <a:srgbClr val="64748B"/>
+                </a:solidFill>
+              </a:defRPr>
+            </a:pPr>
+            <a:r>
+              <a:t>궁금한 사항이 있으실 때는 언제든 상단의 [📖 관리자 매뉴얼]을 다운로드하여 확인하세요.</a:t>
+            </a:r>
+          </a:p>
+        </p:txBody>
+      </p:sp>
+      <p:sp>
+        <p:nvSpPr>
+          <p:cNvPr id="3" name="Rounded Rectangle 2"/>
+          <p:cNvSpPr/>
+          <p:nvPr/>
+        </p:nvSpPr>
+        <p:spPr>
+          <a:xfrm>
+            <a:off x="731520" y="1371600"/>
+            <a:ext cx="10728655" cy="603504"/>
           </a:xfrm>
           <a:prstGeom prst="roundRect">
             <a:avLst/>
@@ -3773,8 +5044,8 @@
         </p:nvSpPr>
         <p:spPr>
           <a:xfrm>
-            <a:off x="914400" y="1627632"/>
-            <a:ext cx="10332720" cy="731520"/>
+            <a:off x="914400" y="1408176"/>
+            <a:ext cx="10332720" cy="530352"/>
           </a:xfrm>
           <a:prstGeom prst="rect">
             <a:avLst/>
@@ -3789,9 +5060,9 @@
           <a:p>
             <a:pPr>
               <a:spcAft>
-                <a:spcPts val="200"/>
-              </a:spcAft>
-              <a:defRPr sz="1300" b="1">
+                <a:spcPts val="100"/>
+              </a:spcAft>
+              <a:defRPr sz="1150" b="1">
                 <a:solidFill>
                   <a:srgbClr val="1E3A8A"/>
                 </a:solidFill>
@@ -3803,7 +5074,7 @@
           </a:p>
           <a:p>
             <a:pPr>
-              <a:defRPr sz="1100">
+              <a:defRPr sz="1000">
                 <a:solidFill>
                   <a:srgbClr val="EA580C"/>
                 </a:solidFill>
@@ -3823,8 +5094,8 @@
         </p:nvSpPr>
         <p:spPr>
           <a:xfrm>
-            <a:off x="731520" y="2514600"/>
-            <a:ext cx="10728655" cy="868680"/>
+            <a:off x="731520" y="2011680"/>
+            <a:ext cx="10728655" cy="603504"/>
           </a:xfrm>
           <a:prstGeom prst="roundRect">
             <a:avLst/>
@@ -3868,8 +5139,8 @@
         </p:nvSpPr>
         <p:spPr>
           <a:xfrm>
-            <a:off x="914400" y="2587752"/>
-            <a:ext cx="10332720" cy="731520"/>
+            <a:off x="914400" y="2048256"/>
+            <a:ext cx="10332720" cy="530352"/>
           </a:xfrm>
           <a:prstGeom prst="rect">
             <a:avLst/>
@@ -3884,9 +5155,9 @@
           <a:p>
             <a:pPr>
               <a:spcAft>
-                <a:spcPts val="200"/>
-              </a:spcAft>
-              <a:defRPr sz="1300" b="1">
+                <a:spcPts val="100"/>
+              </a:spcAft>
+              <a:defRPr sz="1150" b="1">
                 <a:solidFill>
                   <a:srgbClr val="1E3A8A"/>
                 </a:solidFill>
@@ -3898,7 +5169,7 @@
           </a:p>
           <a:p>
             <a:pPr>
-              <a:defRPr sz="1100">
+              <a:defRPr sz="1000">
                 <a:solidFill>
                   <a:srgbClr val="EA580C"/>
                 </a:solidFill>
@@ -3918,8 +5189,8 @@
         </p:nvSpPr>
         <p:spPr>
           <a:xfrm>
-            <a:off x="731520" y="3474720"/>
-            <a:ext cx="10728655" cy="868680"/>
+            <a:off x="731520" y="2651760"/>
+            <a:ext cx="10728655" cy="603504"/>
           </a:xfrm>
           <a:prstGeom prst="roundRect">
             <a:avLst/>
@@ -3963,8 +5234,8 @@
         </p:nvSpPr>
         <p:spPr>
           <a:xfrm>
-            <a:off x="914400" y="3547872"/>
-            <a:ext cx="10332720" cy="731520"/>
+            <a:off x="914400" y="2688336"/>
+            <a:ext cx="10332720" cy="530352"/>
           </a:xfrm>
           <a:prstGeom prst="rect">
             <a:avLst/>
@@ -3979,9 +5250,9 @@
           <a:p>
             <a:pPr>
               <a:spcAft>
-                <a:spcPts val="200"/>
-              </a:spcAft>
-              <a:defRPr sz="1300" b="1">
+                <a:spcPts val="100"/>
+              </a:spcAft>
+              <a:defRPr sz="1150" b="1">
                 <a:solidFill>
                   <a:srgbClr val="1E3A8A"/>
                 </a:solidFill>
@@ -3993,7 +5264,7 @@
           </a:p>
           <a:p>
             <a:pPr>
-              <a:defRPr sz="1100">
+              <a:defRPr sz="1000">
                 <a:solidFill>
                   <a:srgbClr val="EA580C"/>
                 </a:solidFill>
@@ -4013,8 +5284,8 @@
         </p:nvSpPr>
         <p:spPr>
           <a:xfrm>
-            <a:off x="731520" y="4434840"/>
-            <a:ext cx="10728655" cy="868680"/>
+            <a:off x="731520" y="3291839"/>
+            <a:ext cx="10728655" cy="603504"/>
           </a:xfrm>
           <a:prstGeom prst="roundRect">
             <a:avLst/>
@@ -4058,8 +5329,8 @@
         </p:nvSpPr>
         <p:spPr>
           <a:xfrm>
-            <a:off x="914400" y="4507992"/>
-            <a:ext cx="10332720" cy="731520"/>
+            <a:off x="914400" y="3328415"/>
+            <a:ext cx="10332720" cy="530352"/>
           </a:xfrm>
           <a:prstGeom prst="rect">
             <a:avLst/>
@@ -4074,9 +5345,9 @@
           <a:p>
             <a:pPr>
               <a:spcAft>
-                <a:spcPts val="200"/>
-              </a:spcAft>
-              <a:defRPr sz="1300" b="1">
+                <a:spcPts val="100"/>
+              </a:spcAft>
+              <a:defRPr sz="1150" b="1">
                 <a:solidFill>
                   <a:srgbClr val="1E3A8A"/>
                 </a:solidFill>
@@ -4088,7 +5359,7 @@
           </a:p>
           <a:p>
             <a:pPr>
-              <a:defRPr sz="1100">
+              <a:defRPr sz="1000">
                 <a:solidFill>
                   <a:srgbClr val="EA580C"/>
                 </a:solidFill>
@@ -4108,8 +5379,8 @@
         </p:nvSpPr>
         <p:spPr>
           <a:xfrm>
-            <a:off x="731520" y="5394960"/>
-            <a:ext cx="10728655" cy="868680"/>
+            <a:off x="731520" y="3931920"/>
+            <a:ext cx="10728655" cy="603504"/>
           </a:xfrm>
           <a:prstGeom prst="roundRect">
             <a:avLst/>
@@ -4153,8 +5424,8 @@
         </p:nvSpPr>
         <p:spPr>
           <a:xfrm>
-            <a:off x="914400" y="5468112"/>
-            <a:ext cx="10332720" cy="731520"/>
+            <a:off x="914400" y="3968496"/>
+            <a:ext cx="10332720" cy="530352"/>
           </a:xfrm>
           <a:prstGeom prst="rect">
             <a:avLst/>
@@ -4169,9 +5440,9 @@
           <a:p>
             <a:pPr>
               <a:spcAft>
-                <a:spcPts val="200"/>
-              </a:spcAft>
-              <a:defRPr sz="1300" b="1">
+                <a:spcPts val="100"/>
+              </a:spcAft>
+              <a:defRPr sz="1150" b="1">
                 <a:solidFill>
                   <a:srgbClr val="1E3A8A"/>
                 </a:solidFill>
@@ -4183,14 +5454,299 @@
           </a:p>
           <a:p>
             <a:pPr>
-              <a:defRPr sz="1100">
+              <a:defRPr sz="1000">
                 <a:solidFill>
                   <a:srgbClr val="EA580C"/>
                 </a:solidFill>
               </a:defRPr>
             </a:pPr>
             <a:r>
-              <a:t>👉 네! Turso 클라우드 영구 DB 연동으로 모든 데이터가 안전 보존되며, v1.43의 안전 스마트 폴백과 스레드 보호로 특근 신청과 데이터 무결성을 완벽하게 보장합니다.</a:t>
+              <a:t>👉 네! Turso 클라우드 영구 DB 연동으로 모든 데이터가 안전 보존되며, v1.44의 안전 스마트 폴백과 스레드 보호로 특근 신청과 데이터 무결성을 완벽하게 보장합니다.</a:t>
+            </a:r>
+          </a:p>
+        </p:txBody>
+      </p:sp>
+      <p:sp>
+        <p:nvSpPr>
+          <p:cNvPr id="13" name="Rounded Rectangle 12"/>
+          <p:cNvSpPr/>
+          <p:nvPr/>
+        </p:nvSpPr>
+        <p:spPr>
+          <a:xfrm>
+            <a:off x="731520" y="4572000"/>
+            <a:ext cx="10728655" cy="603504"/>
+          </a:xfrm>
+          <a:prstGeom prst="roundRect">
+            <a:avLst/>
+          </a:prstGeom>
+          <a:solidFill>
+            <a:srgbClr val="F8FAFC"/>
+          </a:solidFill>
+          <a:ln>
+            <a:solidFill>
+              <a:srgbClr val="E2E8F0"/>
+            </a:solidFill>
+          </a:ln>
+        </p:spPr>
+        <p:style>
+          <a:lnRef idx="1">
+            <a:schemeClr val="accent1"/>
+          </a:lnRef>
+          <a:fillRef idx="3">
+            <a:schemeClr val="accent1"/>
+          </a:fillRef>
+          <a:effectRef idx="2">
+            <a:schemeClr val="accent1"/>
+          </a:effectRef>
+          <a:fontRef idx="minor">
+            <a:schemeClr val="lt1"/>
+          </a:fontRef>
+        </p:style>
+        <p:txBody>
+          <a:bodyPr rtlCol="0" anchor="ctr"/>
+          <a:lstStyle/>
+          <a:p>
+            <a:pPr algn="ctr"/>
+          </a:p>
+        </p:txBody>
+      </p:sp>
+      <p:sp>
+        <p:nvSpPr>
+          <p:cNvPr id="14" name="TextBox 13"/>
+          <p:cNvSpPr txBox="1"/>
+          <p:nvPr/>
+        </p:nvSpPr>
+        <p:spPr>
+          <a:xfrm>
+            <a:off x="914400" y="4608576"/>
+            <a:ext cx="10332720" cy="530352"/>
+          </a:xfrm>
+          <a:prstGeom prst="rect">
+            <a:avLst/>
+          </a:prstGeom>
+          <a:noFill/>
+        </p:spPr>
+        <p:txBody>
+          <a:bodyPr wrap="square">
+            <a:spAutoFit/>
+          </a:bodyPr>
+          <a:lstStyle/>
+          <a:p>
+            <a:pPr>
+              <a:spcAft>
+                <a:spcPts val="100"/>
+              </a:spcAft>
+              <a:defRPr sz="1150" b="1">
+                <a:solidFill>
+                  <a:srgbClr val="1E3A8A"/>
+                </a:solidFill>
+              </a:defRPr>
+            </a:pPr>
+            <a:r>
+              <a:t>Q6. 특근 4단계 라이프사이클에서 관리자의 [검토완료]는 어떤 의미인가요?</a:t>
+            </a:r>
+          </a:p>
+          <a:p>
+            <a:pPr>
+              <a:defRPr sz="1000">
+                <a:solidFill>
+                  <a:srgbClr val="EA580C"/>
+                </a:solidFill>
+              </a:defRPr>
+            </a:pPr>
+            <a:r>
+              <a:t>👉 사원 및 관리자가 실제 특근 완료를 [확정]한 후, 관리자가 급여/노무 정산 직전 최종 검토하여 마감 처리했음을 공인하는 최종 단계입니다.</a:t>
+            </a:r>
+          </a:p>
+        </p:txBody>
+      </p:sp>
+      <p:sp>
+        <p:nvSpPr>
+          <p:cNvPr id="15" name="Rounded Rectangle 14"/>
+          <p:cNvSpPr/>
+          <p:nvPr/>
+        </p:nvSpPr>
+        <p:spPr>
+          <a:xfrm>
+            <a:off x="731520" y="5212079"/>
+            <a:ext cx="10728655" cy="603504"/>
+          </a:xfrm>
+          <a:prstGeom prst="roundRect">
+            <a:avLst/>
+          </a:prstGeom>
+          <a:solidFill>
+            <a:srgbClr val="F8FAFC"/>
+          </a:solidFill>
+          <a:ln>
+            <a:solidFill>
+              <a:srgbClr val="E2E8F0"/>
+            </a:solidFill>
+          </a:ln>
+        </p:spPr>
+        <p:style>
+          <a:lnRef idx="1">
+            <a:schemeClr val="accent1"/>
+          </a:lnRef>
+          <a:fillRef idx="3">
+            <a:schemeClr val="accent1"/>
+          </a:fillRef>
+          <a:effectRef idx="2">
+            <a:schemeClr val="accent1"/>
+          </a:effectRef>
+          <a:fontRef idx="minor">
+            <a:schemeClr val="lt1"/>
+          </a:fontRef>
+        </p:style>
+        <p:txBody>
+          <a:bodyPr rtlCol="0" anchor="ctr"/>
+          <a:lstStyle/>
+          <a:p>
+            <a:pPr algn="ctr"/>
+          </a:p>
+        </p:txBody>
+      </p:sp>
+      <p:sp>
+        <p:nvSpPr>
+          <p:cNvPr id="16" name="TextBox 15"/>
+          <p:cNvSpPr txBox="1"/>
+          <p:nvPr/>
+        </p:nvSpPr>
+        <p:spPr>
+          <a:xfrm>
+            <a:off x="914400" y="5248655"/>
+            <a:ext cx="10332720" cy="530352"/>
+          </a:xfrm>
+          <a:prstGeom prst="rect">
+            <a:avLst/>
+          </a:prstGeom>
+          <a:noFill/>
+        </p:spPr>
+        <p:txBody>
+          <a:bodyPr wrap="square">
+            <a:spAutoFit/>
+          </a:bodyPr>
+          <a:lstStyle/>
+          <a:p>
+            <a:pPr>
+              <a:spcAft>
+                <a:spcPts val="100"/>
+              </a:spcAft>
+              <a:defRPr sz="1150" b="1">
+                <a:solidFill>
+                  <a:srgbClr val="1E3A8A"/>
+                </a:solidFill>
+              </a:defRPr>
+            </a:pPr>
+            <a:r>
+              <a:t>Q7. 엑셀 내보내기에서 4단계 특근일수는 어떻게 구분되어 나오나요?</a:t>
+            </a:r>
+          </a:p>
+          <a:p>
+            <a:pPr>
+              <a:defRPr sz="1000">
+                <a:solidFill>
+                  <a:srgbClr val="EA580C"/>
+                </a:solidFill>
+              </a:defRPr>
+            </a:pPr>
+            <a:r>
+              <a:t>👉 Sheet 1에는 4단계 진행상태와 승인/확정/검토자가 명시되며, Sheet 2 개인별 정산표 및 Sheet 4 부서별 요약에 신청·승인·확정·검토완료 일수가 각각 독립 열로 자동 집계됩니다.</a:t>
+            </a:r>
+          </a:p>
+        </p:txBody>
+      </p:sp>
+      <p:sp>
+        <p:nvSpPr>
+          <p:cNvPr id="17" name="Rounded Rectangle 16"/>
+          <p:cNvSpPr/>
+          <p:nvPr/>
+        </p:nvSpPr>
+        <p:spPr>
+          <a:xfrm>
+            <a:off x="731520" y="5852159"/>
+            <a:ext cx="10728655" cy="603504"/>
+          </a:xfrm>
+          <a:prstGeom prst="roundRect">
+            <a:avLst/>
+          </a:prstGeom>
+          <a:solidFill>
+            <a:srgbClr val="F8FAFC"/>
+          </a:solidFill>
+          <a:ln>
+            <a:solidFill>
+              <a:srgbClr val="E2E8F0"/>
+            </a:solidFill>
+          </a:ln>
+        </p:spPr>
+        <p:style>
+          <a:lnRef idx="1">
+            <a:schemeClr val="accent1"/>
+          </a:lnRef>
+          <a:fillRef idx="3">
+            <a:schemeClr val="accent1"/>
+          </a:fillRef>
+          <a:effectRef idx="2">
+            <a:schemeClr val="accent1"/>
+          </a:effectRef>
+          <a:fontRef idx="minor">
+            <a:schemeClr val="lt1"/>
+          </a:fontRef>
+        </p:style>
+        <p:txBody>
+          <a:bodyPr rtlCol="0" anchor="ctr"/>
+          <a:lstStyle/>
+          <a:p>
+            <a:pPr algn="ctr"/>
+          </a:p>
+        </p:txBody>
+      </p:sp>
+      <p:sp>
+        <p:nvSpPr>
+          <p:cNvPr id="18" name="TextBox 17"/>
+          <p:cNvSpPr txBox="1"/>
+          <p:nvPr/>
+        </p:nvSpPr>
+        <p:spPr>
+          <a:xfrm>
+            <a:off x="914400" y="5888735"/>
+            <a:ext cx="10332720" cy="530352"/>
+          </a:xfrm>
+          <a:prstGeom prst="rect">
+            <a:avLst/>
+          </a:prstGeom>
+          <a:noFill/>
+        </p:spPr>
+        <p:txBody>
+          <a:bodyPr wrap="square">
+            <a:spAutoFit/>
+          </a:bodyPr>
+          <a:lstStyle/>
+          <a:p>
+            <a:pPr>
+              <a:spcAft>
+                <a:spcPts val="100"/>
+              </a:spcAft>
+              <a:defRPr sz="1150" b="1">
+                <a:solidFill>
+                  <a:srgbClr val="1E3A8A"/>
+                </a:solidFill>
+              </a:defRPr>
+            </a:pPr>
+            <a:r>
+              <a:t>Q8. 무기명 건의사항 소통함에서 관리자는 어떤 관리를 하나요?</a:t>
+            </a:r>
+          </a:p>
+          <a:p>
+            <a:pPr>
+              <a:defRPr sz="1000">
+                <a:solidFill>
+                  <a:srgbClr val="EA580C"/>
+                </a:solidFill>
+              </a:defRPr>
+            </a:pPr>
+            <a:r>
+              <a:t>👉 사원들이 무기명으로 접수한 모든 건의사항에 대해 조치 상태(접수완료/검토중/처리완료/보류)를 갱신하고 공식 답변을 등록하거나 부적절한 게시물을 삭제 관리합니다.</a:t>
             </a:r>
           </a:p>
         </p:txBody>
@@ -4637,8 +6193,8 @@
         </p:nvSpPr>
         <p:spPr>
           <a:xfrm>
-            <a:off x="731520" y="365760"/>
-            <a:ext cx="10698480" cy="1005840"/>
+            <a:off x="548640" y="320040"/>
+            <a:ext cx="11155680" cy="1005840"/>
           </a:xfrm>
           <a:prstGeom prst="rect">
             <a:avLst/>
@@ -4696,8 +6252,8 @@
         </p:nvSpPr>
         <p:spPr>
           <a:xfrm>
-            <a:off x="731520" y="1508760"/>
-            <a:ext cx="4480560" cy="4937760"/>
+            <a:off x="548640" y="1417320"/>
+            <a:ext cx="3474720" cy="5166360"/>
           </a:xfrm>
           <a:prstGeom prst="roundRect">
             <a:avLst/>
@@ -4741,8 +6297,8 @@
         </p:nvSpPr>
         <p:spPr>
           <a:xfrm>
-            <a:off x="914400" y="1645920"/>
-            <a:ext cx="4114800" cy="4663440"/>
+            <a:off x="685800" y="1554480"/>
+            <a:ext cx="3200400" cy="4892040"/>
           </a:xfrm>
           <a:prstGeom prst="rect">
             <a:avLst/>
@@ -4759,7 +6315,7 @@
               <a:spcAft>
                 <a:spcPts val="200"/>
               </a:spcAft>
-              <a:defRPr sz="1300" b="1">
+              <a:defRPr sz="1250" b="1">
                 <a:solidFill>
                   <a:srgbClr val="EA580C"/>
                 </a:solidFill>
@@ -4772,9 +6328,9 @@
           <a:p>
             <a:pPr>
               <a:spcAft>
-                <a:spcPts val="1000"/>
-              </a:spcAft>
-              <a:defRPr sz="1100">
+                <a:spcPts val="800"/>
+              </a:spcAft>
+              <a:defRPr sz="1050">
                 <a:solidFill>
                   <a:srgbClr val="0F172A"/>
                 </a:solidFill>
@@ -4789,7 +6345,7 @@
               <a:spcAft>
                 <a:spcPts val="200"/>
               </a:spcAft>
-              <a:defRPr sz="1300" b="1">
+              <a:defRPr sz="1250" b="1">
                 <a:solidFill>
                   <a:srgbClr val="EA580C"/>
                 </a:solidFill>
@@ -4802,9 +6358,9 @@
           <a:p>
             <a:pPr>
               <a:spcAft>
-                <a:spcPts val="1000"/>
-              </a:spcAft>
-              <a:defRPr sz="1100">
+                <a:spcPts val="800"/>
+              </a:spcAft>
+              <a:defRPr sz="1050">
                 <a:solidFill>
                   <a:srgbClr val="0F172A"/>
                 </a:solidFill>
@@ -4819,7 +6375,7 @@
               <a:spcAft>
                 <a:spcPts val="200"/>
               </a:spcAft>
-              <a:defRPr sz="1300" b="1">
+              <a:defRPr sz="1250" b="1">
                 <a:solidFill>
                   <a:srgbClr val="EA580C"/>
                 </a:solidFill>
@@ -4832,9 +6388,9 @@
           <a:p>
             <a:pPr>
               <a:spcAft>
-                <a:spcPts val="1000"/>
-              </a:spcAft>
-              <a:defRPr sz="1100">
+                <a:spcPts val="800"/>
+              </a:spcAft>
+              <a:defRPr sz="1050">
                 <a:solidFill>
                   <a:srgbClr val="0F172A"/>
                 </a:solidFill>
@@ -4849,7 +6405,7 @@
               <a:spcAft>
                 <a:spcPts val="200"/>
               </a:spcAft>
-              <a:defRPr sz="1300" b="1">
+              <a:defRPr sz="1250" b="1">
                 <a:solidFill>
                   <a:srgbClr val="EA580C"/>
                 </a:solidFill>
@@ -4862,9 +6418,9 @@
           <a:p>
             <a:pPr>
               <a:spcAft>
-                <a:spcPts val="1000"/>
-              </a:spcAft>
-              <a:defRPr sz="1100">
+                <a:spcPts val="800"/>
+              </a:spcAft>
+              <a:defRPr sz="1050">
                 <a:solidFill>
                   <a:srgbClr val="0F172A"/>
                 </a:solidFill>
@@ -4892,8 +6448,8 @@
         </p:blipFill>
         <p:spPr>
           <a:xfrm>
-            <a:off x="5394960" y="1508760"/>
-            <a:ext cx="6035040" cy="3745887"/>
+            <a:off x="4160520" y="1417320"/>
+            <a:ext cx="7543800" cy="5166360"/>
           </a:xfrm>
           <a:prstGeom prst="rect">
             <a:avLst/>
@@ -5342,8 +6898,8 @@
         </p:nvSpPr>
         <p:spPr>
           <a:xfrm>
-            <a:off x="731520" y="365760"/>
-            <a:ext cx="10698480" cy="1005840"/>
+            <a:off x="548640" y="320040"/>
+            <a:ext cx="11155680" cy="1005840"/>
           </a:xfrm>
           <a:prstGeom prst="rect">
             <a:avLst/>
@@ -5401,8 +6957,8 @@
         </p:nvSpPr>
         <p:spPr>
           <a:xfrm>
-            <a:off x="731520" y="1508760"/>
-            <a:ext cx="4480560" cy="4937760"/>
+            <a:off x="548640" y="1417320"/>
+            <a:ext cx="3474720" cy="5166360"/>
           </a:xfrm>
           <a:prstGeom prst="roundRect">
             <a:avLst/>
@@ -5446,8 +7002,8 @@
         </p:nvSpPr>
         <p:spPr>
           <a:xfrm>
-            <a:off x="914400" y="1645920"/>
-            <a:ext cx="4114800" cy="4663440"/>
+            <a:off x="685800" y="1554480"/>
+            <a:ext cx="3200400" cy="4892040"/>
           </a:xfrm>
           <a:prstGeom prst="rect">
             <a:avLst/>
@@ -5464,7 +7020,7 @@
               <a:spcAft>
                 <a:spcPts val="200"/>
               </a:spcAft>
-              <a:defRPr sz="1300" b="1">
+              <a:defRPr sz="1250" b="1">
                 <a:solidFill>
                   <a:srgbClr val="EA580C"/>
                 </a:solidFill>
@@ -5477,9 +7033,9 @@
           <a:p>
             <a:pPr>
               <a:spcAft>
-                <a:spcPts val="1000"/>
-              </a:spcAft>
-              <a:defRPr sz="1100">
+                <a:spcPts val="800"/>
+              </a:spcAft>
+              <a:defRPr sz="1050">
                 <a:solidFill>
                   <a:srgbClr val="0F172A"/>
                 </a:solidFill>
@@ -5494,7 +7050,7 @@
               <a:spcAft>
                 <a:spcPts val="200"/>
               </a:spcAft>
-              <a:defRPr sz="1300" b="1">
+              <a:defRPr sz="1250" b="1">
                 <a:solidFill>
                   <a:srgbClr val="EA580C"/>
                 </a:solidFill>
@@ -5507,9 +7063,9 @@
           <a:p>
             <a:pPr>
               <a:spcAft>
-                <a:spcPts val="1000"/>
-              </a:spcAft>
-              <a:defRPr sz="1100">
+                <a:spcPts val="800"/>
+              </a:spcAft>
+              <a:defRPr sz="1050">
                 <a:solidFill>
                   <a:srgbClr val="0F172A"/>
                 </a:solidFill>
@@ -5524,7 +7080,7 @@
               <a:spcAft>
                 <a:spcPts val="200"/>
               </a:spcAft>
-              <a:defRPr sz="1300" b="1">
+              <a:defRPr sz="1250" b="1">
                 <a:solidFill>
                   <a:srgbClr val="EA580C"/>
                 </a:solidFill>
@@ -5537,9 +7093,9 @@
           <a:p>
             <a:pPr>
               <a:spcAft>
-                <a:spcPts val="1000"/>
-              </a:spcAft>
-              <a:defRPr sz="1100">
+                <a:spcPts val="800"/>
+              </a:spcAft>
+              <a:defRPr sz="1050">
                 <a:solidFill>
                   <a:srgbClr val="0F172A"/>
                 </a:solidFill>
@@ -5554,7 +7110,7 @@
               <a:spcAft>
                 <a:spcPts val="200"/>
               </a:spcAft>
-              <a:defRPr sz="1300" b="1">
+              <a:defRPr sz="1250" b="1">
                 <a:solidFill>
                   <a:srgbClr val="EA580C"/>
                 </a:solidFill>
@@ -5567,9 +7123,9 @@
           <a:p>
             <a:pPr>
               <a:spcAft>
-                <a:spcPts val="1000"/>
-              </a:spcAft>
-              <a:defRPr sz="1100">
+                <a:spcPts val="800"/>
+              </a:spcAft>
+              <a:defRPr sz="1050">
                 <a:solidFill>
                   <a:srgbClr val="0F172A"/>
                 </a:solidFill>
@@ -5597,8 +7153,8 @@
         </p:blipFill>
         <p:spPr>
           <a:xfrm>
-            <a:off x="5394960" y="1508760"/>
-            <a:ext cx="6035040" cy="3745887"/>
+            <a:off x="4160520" y="1417320"/>
+            <a:ext cx="7543800" cy="5166360"/>
           </a:xfrm>
           <a:prstGeom prst="rect">
             <a:avLst/>
@@ -5631,8 +7187,8 @@
         </p:nvSpPr>
         <p:spPr>
           <a:xfrm>
-            <a:off x="731520" y="365760"/>
-            <a:ext cx="10698480" cy="1005840"/>
+            <a:off x="548640" y="320040"/>
+            <a:ext cx="11155680" cy="1005840"/>
           </a:xfrm>
           <a:prstGeom prst="rect">
             <a:avLst/>
@@ -5690,8 +7246,8 @@
         </p:nvSpPr>
         <p:spPr>
           <a:xfrm>
-            <a:off x="731520" y="1508760"/>
-            <a:ext cx="4480560" cy="4937760"/>
+            <a:off x="548640" y="1417320"/>
+            <a:ext cx="3474720" cy="5166360"/>
           </a:xfrm>
           <a:prstGeom prst="roundRect">
             <a:avLst/>
@@ -5735,8 +7291,8 @@
         </p:nvSpPr>
         <p:spPr>
           <a:xfrm>
-            <a:off x="914400" y="1645920"/>
-            <a:ext cx="4114800" cy="4663440"/>
+            <a:off x="685800" y="1554480"/>
+            <a:ext cx="3200400" cy="4892040"/>
           </a:xfrm>
           <a:prstGeom prst="rect">
             <a:avLst/>
@@ -5753,22 +7309,22 @@
               <a:spcAft>
                 <a:spcPts val="200"/>
               </a:spcAft>
-              <a:defRPr sz="1300" b="1">
+              <a:defRPr sz="1250" b="1">
                 <a:solidFill>
                   <a:srgbClr val="EA580C"/>
                 </a:solidFill>
               </a:defRPr>
             </a:pPr>
             <a:r>
-              <a:t>① 최신 실특근 산정 공식 (v1.43)</a:t>
-            </a:r>
-          </a:p>
-          <a:p>
-            <a:pPr>
-              <a:spcAft>
-                <a:spcPts val="1000"/>
-              </a:spcAft>
-              <a:defRPr sz="1100">
+              <a:t>① 최신 실특근 산정 공식 (v1.44)</a:t>
+            </a:r>
+          </a:p>
+          <a:p>
+            <a:pPr>
+              <a:spcAft>
+                <a:spcPts val="800"/>
+              </a:spcAft>
+              <a:defRPr sz="1050">
                 <a:solidFill>
                   <a:srgbClr val="0F172A"/>
                 </a:solidFill>
@@ -5787,7 +7343,7 @@
               <a:spcAft>
                 <a:spcPts val="200"/>
               </a:spcAft>
-              <a:defRPr sz="1300" b="1">
+              <a:defRPr sz="1250" b="1">
                 <a:solidFill>
                   <a:srgbClr val="EA580C"/>
                 </a:solidFill>
@@ -5800,9 +7356,9 @@
           <a:p>
             <a:pPr>
               <a:spcAft>
-                <a:spcPts val="1000"/>
-              </a:spcAft>
-              <a:defRPr sz="1100">
+                <a:spcPts val="800"/>
+              </a:spcAft>
+              <a:defRPr sz="1050">
                 <a:solidFill>
                   <a:srgbClr val="0F172A"/>
                 </a:solidFill>
@@ -5817,7 +7373,7 @@
               <a:spcAft>
                 <a:spcPts val="200"/>
               </a:spcAft>
-              <a:defRPr sz="1300" b="1">
+              <a:defRPr sz="1250" b="1">
                 <a:solidFill>
                   <a:srgbClr val="EA580C"/>
                 </a:solidFill>
@@ -5830,9 +7386,9 @@
           <a:p>
             <a:pPr>
               <a:spcAft>
-                <a:spcPts val="1000"/>
-              </a:spcAft>
-              <a:defRPr sz="1100">
+                <a:spcPts val="800"/>
+              </a:spcAft>
+              <a:defRPr sz="1050">
                 <a:solidFill>
                   <a:srgbClr val="0F172A"/>
                 </a:solidFill>
@@ -5847,7 +7403,7 @@
               <a:spcAft>
                 <a:spcPts val="200"/>
               </a:spcAft>
-              <a:defRPr sz="1300" b="1">
+              <a:defRPr sz="1250" b="1">
                 <a:solidFill>
                   <a:srgbClr val="EA580C"/>
                 </a:solidFill>
@@ -5860,9 +7416,9 @@
           <a:p>
             <a:pPr>
               <a:spcAft>
-                <a:spcPts val="1000"/>
-              </a:spcAft>
-              <a:defRPr sz="1100">
+                <a:spcPts val="800"/>
+              </a:spcAft>
+              <a:defRPr sz="1050">
                 <a:solidFill>
                   <a:srgbClr val="0F172A"/>
                 </a:solidFill>
@@ -5890,8 +7446,8 @@
         </p:blipFill>
         <p:spPr>
           <a:xfrm>
-            <a:off x="5394960" y="1508760"/>
-            <a:ext cx="6035040" cy="3745887"/>
+            <a:off x="4160520" y="1417320"/>
+            <a:ext cx="7543800" cy="5166360"/>
           </a:xfrm>
           <a:prstGeom prst="rect">
             <a:avLst/>
@@ -5924,8 +7480,8 @@
         </p:nvSpPr>
         <p:spPr>
           <a:xfrm>
-            <a:off x="731520" y="365760"/>
-            <a:ext cx="10698480" cy="1005840"/>
+            <a:off x="548640" y="320040"/>
+            <a:ext cx="11155680" cy="1005840"/>
           </a:xfrm>
           <a:prstGeom prst="rect">
             <a:avLst/>
@@ -5983,8 +7539,8 @@
         </p:nvSpPr>
         <p:spPr>
           <a:xfrm>
-            <a:off x="731520" y="1508760"/>
-            <a:ext cx="4480560" cy="4937760"/>
+            <a:off x="548640" y="1417320"/>
+            <a:ext cx="3474720" cy="5166360"/>
           </a:xfrm>
           <a:prstGeom prst="roundRect">
             <a:avLst/>
@@ -6028,8 +7584,8 @@
         </p:nvSpPr>
         <p:spPr>
           <a:xfrm>
-            <a:off x="914400" y="1645920"/>
-            <a:ext cx="4114800" cy="4663440"/>
+            <a:off x="685800" y="1554480"/>
+            <a:ext cx="3200400" cy="4892040"/>
           </a:xfrm>
           <a:prstGeom prst="rect">
             <a:avLst/>
@@ -6046,7 +7602,7 @@
               <a:spcAft>
                 <a:spcPts val="200"/>
               </a:spcAft>
-              <a:defRPr sz="1300" b="1">
+              <a:defRPr sz="1250" b="1">
                 <a:solidFill>
                   <a:srgbClr val="EA580C"/>
                 </a:solidFill>
@@ -6059,9 +7615,9 @@
           <a:p>
             <a:pPr>
               <a:spcAft>
-                <a:spcPts val="1000"/>
-              </a:spcAft>
-              <a:defRPr sz="1100">
+                <a:spcPts val="800"/>
+              </a:spcAft>
+              <a:defRPr sz="1050">
                 <a:solidFill>
                   <a:srgbClr val="0F172A"/>
                 </a:solidFill>
@@ -6076,7 +7632,7 @@
               <a:spcAft>
                 <a:spcPts val="200"/>
               </a:spcAft>
-              <a:defRPr sz="1300" b="1">
+              <a:defRPr sz="1250" b="1">
                 <a:solidFill>
                   <a:srgbClr val="EA580C"/>
                 </a:solidFill>
@@ -6089,9 +7645,9 @@
           <a:p>
             <a:pPr>
               <a:spcAft>
-                <a:spcPts val="1000"/>
-              </a:spcAft>
-              <a:defRPr sz="1100">
+                <a:spcPts val="800"/>
+              </a:spcAft>
+              <a:defRPr sz="1050">
                 <a:solidFill>
                   <a:srgbClr val="0F172A"/>
                 </a:solidFill>
@@ -6106,7 +7662,7 @@
               <a:spcAft>
                 <a:spcPts val="200"/>
               </a:spcAft>
-              <a:defRPr sz="1300" b="1">
+              <a:defRPr sz="1250" b="1">
                 <a:solidFill>
                   <a:srgbClr val="EA580C"/>
                 </a:solidFill>
@@ -6119,9 +7675,9 @@
           <a:p>
             <a:pPr>
               <a:spcAft>
-                <a:spcPts val="1000"/>
-              </a:spcAft>
-              <a:defRPr sz="1100">
+                <a:spcPts val="800"/>
+              </a:spcAft>
+              <a:defRPr sz="1050">
                 <a:solidFill>
                   <a:srgbClr val="0F172A"/>
                 </a:solidFill>
@@ -6136,7 +7692,7 @@
               <a:spcAft>
                 <a:spcPts val="200"/>
               </a:spcAft>
-              <a:defRPr sz="1300" b="1">
+              <a:defRPr sz="1250" b="1">
                 <a:solidFill>
                   <a:srgbClr val="EA580C"/>
                 </a:solidFill>
@@ -6149,9 +7705,9 @@
           <a:p>
             <a:pPr>
               <a:spcAft>
-                <a:spcPts val="1000"/>
-              </a:spcAft>
-              <a:defRPr sz="1100">
+                <a:spcPts val="800"/>
+              </a:spcAft>
+              <a:defRPr sz="1050">
                 <a:solidFill>
                   <a:srgbClr val="0F172A"/>
                 </a:solidFill>
@@ -6179,8 +7735,8 @@
         </p:blipFill>
         <p:spPr>
           <a:xfrm>
-            <a:off x="5394960" y="1508760"/>
-            <a:ext cx="6035040" cy="3745887"/>
+            <a:off x="4160520" y="1417320"/>
+            <a:ext cx="7543800" cy="5166360"/>
           </a:xfrm>
           <a:prstGeom prst="rect">
             <a:avLst/>
@@ -6235,7 +7791,7 @@
               </a:defRPr>
             </a:pPr>
             <a:r>
-              <a:t>STEP 07  |  관리자 전용 웹 데이터 스냅샷 백업 &amp; 복원</a:t>
+              <a:t>STEP 07  |  특근 4단계 검증 체계 및 [검토완료] 마감 (v1.44 신규)</a:t>
             </a:r>
           </a:p>
           <a:p>
@@ -6247,7 +7803,7 @@
               </a:defRPr>
             </a:pPr>
             <a:r>
-              <a:t>💾 웹 저장(스냅샷 백업) 및 📂 웹 열기(원클릭 복원)</a:t>
+              <a:t>특근 4단계 검증 체계 및 관리자 [검토완료] 최종 마감</a:t>
             </a:r>
           </a:p>
           <a:p>
@@ -6259,7 +7815,7 @@
               </a:defRPr>
             </a:pPr>
             <a:r>
-              <a:t>사원 화면에서는 숨겨져 관리자만 전담 제어하며, 전체 DB를 안전한 JSON 스냅샷으로 영구 보존합니다.</a:t>
+              <a:t>사원의 확정 피드백 검증, [검토완료] 원클릭 마감 및 상단 [일괄 확정/검토] 강력 지원</a:t>
             </a:r>
           </a:p>
         </p:txBody>
@@ -6342,7 +7898,7 @@
               </a:defRPr>
             </a:pPr>
             <a:r>
-              <a:t>백업 관리 01</a:t>
+              <a:t>검증 원칙 01</a:t>
             </a:r>
           </a:p>
           <a:p>
@@ -6357,22 +7913,30 @@
               </a:defRPr>
             </a:pPr>
             <a:r>
-              <a:t>1. 💾 신규 웹 스냅샷 저장</a:t>
+              <a:t>1. 4단계 라이프사이클 통제</a:t>
             </a:r>
           </a:p>
           <a:p>
             <a:pPr>
               <a:lnSpc>
-                <a:spcPct val="130000"/>
+                <a:spcPct val="135000"/>
               </a:lnSpc>
-              <a:defRPr sz="1300">
+              <a:defRPr sz="1250">
                 <a:solidFill>
                   <a:srgbClr val="0F172A"/>
                 </a:solidFill>
               </a:defRPr>
             </a:pPr>
             <a:r>
-              <a:t>전체 팀원 명부, 소속팀 목록, 특근 신청 및 이력 데이터를 안전한 JSON 파일로 서버에 즉시 보관합니다.</a:t>
+              <a:t>• 1단계(신청:회색), 2단계(승인:청색), 3단계(확정:주황), 4단계(검토완료:보라) 컬러 배지로 상태 직관 파악</a:t>
+            </a:r>
+            <a:br/>
+            <a:r>
+              <a:t>• 테이블 검색 필터에서 4단계를 각각 선택하여 대기/완료 현황을 1초 만에 필터링 조회합니다.</a:t>
+            </a:r>
+            <a:br/>
+            <a:r>
+              <a:t>• 미니 통계 칩에 신청, 승인, 확정, 검토완료 수량이 실시간 집계됩니다.</a:t>
             </a:r>
           </a:p>
         </p:txBody>
@@ -6455,7 +8019,7 @@
               </a:defRPr>
             </a:pPr>
             <a:r>
-              <a:t>백업 관리 02</a:t>
+              <a:t>검증 원칙 02</a:t>
             </a:r>
           </a:p>
           <a:p>
@@ -6470,22 +8034,30 @@
               </a:defRPr>
             </a:pPr>
             <a:r>
-              <a:t>2. 📂 저장된 스냅샷 원클릭 복원</a:t>
+              <a:t>2. 건별 [🎯 확정] 및 [🟣 검토완료]</a:t>
             </a:r>
           </a:p>
           <a:p>
             <a:pPr>
               <a:lnSpc>
-                <a:spcPct val="130000"/>
+                <a:spcPct val="135000"/>
               </a:lnSpc>
-              <a:defRPr sz="1300">
+              <a:defRPr sz="1250">
                 <a:solidFill>
                   <a:srgbClr val="0F172A"/>
                 </a:solidFill>
               </a:defRPr>
             </a:pPr>
             <a:r>
-              <a:t>저장된 백업 목록에서 원하는 시점의 [열기] 버튼을 누르면 해당 시점의 데이터로 1초 만에 안전 복원됩니다.</a:t>
+              <a:t>• 관리자가 사원을 대신해 직접 [🎯 확정] 버튼을 눌러 피드백을 처리할 수 있습니다.</a:t>
+            </a:r>
+            <a:br/>
+            <a:r>
+              <a:t>• 사원 또는 관리자가 확정한 건에 대해 [🟣 검토완료] 버튼을 클릭해 최종 검토 마감 처리합니다.</a:t>
+            </a:r>
+            <a:br/>
+            <a:r>
+              <a:t>• 검토완료 시 검토자 성명과 일시(예: 홍길동(09-21 14:00))가 안전 기록됩니다.</a:t>
             </a:r>
           </a:p>
         </p:txBody>
@@ -6568,7 +8140,7 @@
               </a:defRPr>
             </a:pPr>
             <a:r>
-              <a:t>백업 관리 03</a:t>
+              <a:t>검증 원칙 03</a:t>
             </a:r>
           </a:p>
           <a:p>
@@ -6583,22 +8155,30 @@
               </a:defRPr>
             </a:pPr>
             <a:r>
-              <a:t>3. 자동 안전 보조백업 생성</a:t>
+              <a:t>3. 상단 [일괄 확정] &amp; [일괄 검토완료]</a:t>
             </a:r>
           </a:p>
           <a:p>
             <a:pPr>
               <a:lnSpc>
-                <a:spcPct val="130000"/>
+                <a:spcPct val="135000"/>
               </a:lnSpc>
-              <a:defRPr sz="1300">
+              <a:defRPr sz="1250">
                 <a:solidFill>
                   <a:srgbClr val="0F172A"/>
                 </a:solidFill>
               </a:defRPr>
             </a:pPr>
             <a:r>
-              <a:t>복원 실행 시 현재 데이터가 사라지지 않도록 직전 상태의 보조 백업을 자동 생성하여 무소실을 보장합니다.</a:t>
+              <a:t>• 관리자 테이블 목록에서 체크박스로 여러 특근 건을 복수 선택합니다.</a:t>
+            </a:r>
+            <a:br/>
+            <a:r>
+              <a:t>• 상단의 [🎯 일괄 확정] 또는 [🟣 일괄 검토완료] 버튼을 눌러 대량의 특근을 한 번에 마감!</a:t>
+            </a:r>
+            <a:br/>
+            <a:r>
+              <a:t>• 월말 및 분기별 대규모 정산 시 소요 시간을 90% 이상 단축합니다.</a:t>
             </a:r>
           </a:p>
         </p:txBody>
@@ -6651,7 +8231,7 @@
               </a:defRPr>
             </a:pPr>
             <a:r>
-              <a:t>STEP 08  |  슈퍼관리자 전용 시스템 보안 및 접속 감사 로그 (v1.36 신규)</a:t>
+              <a:t>STEP 08  |  특근정보 엑셀 내보내기 4단계 구분 집계 (v1.44 신규)</a:t>
             </a:r>
           </a:p>
           <a:p>
@@ -6663,7 +8243,7 @@
               </a:defRPr>
             </a:pPr>
             <a:r>
-              <a:t>🛡️ 시스템 보안 및 사용자 접속 감사 로그 관리</a:t>
+              <a:t>엑셀 보고서 4단계(신청·승인·확정·검토) 일수 완벽 분리 집계</a:t>
             </a:r>
           </a:p>
           <a:p>
@@ -6675,7 +8255,7 @@
               </a:defRPr>
             </a:pPr>
             <a:r>
-              <a:t>사원 로그인 시도(성공/실패), 신규 사원 등록, IP 주소 및 기기(User-Agent) 이력을 실시간 감사·추적합니다.</a:t>
+              <a:t>신청, 승인, 확정, 검토완료 4단계에 따라 최종특근일을 명확히 구분 산출합니다.</a:t>
             </a:r>
           </a:p>
         </p:txBody>
@@ -6758,7 +8338,7 @@
               </a:defRPr>
             </a:pPr>
             <a:r>
-              <a:t>보안 체계 01</a:t>
+              <a:t>집계 규격 01</a:t>
             </a:r>
           </a:p>
           <a:p>
@@ -6773,22 +8353,30 @@
               </a:defRPr>
             </a:pPr>
             <a:r>
-              <a:t>1. 실시간 접속/보안 감사 추적</a:t>
+              <a:t>1. Sheet 1 [휴일일자별_특근현황]</a:t>
             </a:r>
           </a:p>
           <a:p>
             <a:pPr>
               <a:lnSpc>
-                <a:spcPct val="130000"/>
+                <a:spcPct val="135000"/>
               </a:lnSpc>
-              <a:defRPr sz="1300">
+              <a:defRPr sz="1250">
                 <a:solidFill>
                   <a:srgbClr val="0F172A"/>
                 </a:solidFill>
               </a:defRPr>
             </a:pPr>
             <a:r>
-              <a:t>로그인 시도 성공/실패, 미등록 사번 접근 시도, 신규 사원 등록, 로그아웃 이력이 초단위로 영구 기록됩니다.</a:t>
+              <a:t>• 4단계 진행상태 열(신청:회색, 승인:청색, 확정:주황, 검토완료:보라) 컬러 스타일 적용</a:t>
+            </a:r>
+            <a:br/>
+            <a:r>
+              <a:t>• 승인자, 확정자, 검토완료자 일시 정보가 정확하게 기록됩니다.</a:t>
+            </a:r>
+            <a:br/>
+            <a:r>
+              <a:t>• 특정 일자에 누가 확정하고 검토했는지 한눈에 추적 가능합니다.</a:t>
             </a:r>
           </a:p>
         </p:txBody>
@@ -6871,7 +8459,7 @@
               </a:defRPr>
             </a:pPr>
             <a:r>
-              <a:t>보안 체계 02</a:t>
+              <a:t>집계 규격 02</a:t>
             </a:r>
           </a:p>
           <a:p>
@@ -6886,22 +8474,30 @@
               </a:defRPr>
             </a:pPr>
             <a:r>
-              <a:t>2. 다차원 필터링 &amp; 판독 용이성</a:t>
+              <a:t>2. Sheet 2 [개인별_휴일합산_정산표]</a:t>
             </a:r>
           </a:p>
           <a:p>
             <a:pPr>
               <a:lnSpc>
-                <a:spcPct val="130000"/>
+                <a:spcPct val="135000"/>
               </a:lnSpc>
-              <a:defRPr sz="1300">
+              <a:defRPr sz="1250">
                 <a:solidFill>
                   <a:srgbClr val="0F172A"/>
                 </a:solidFill>
               </a:defRPr>
             </a:pPr>
             <a:r>
-              <a:t>기간(시작~종료), 액션 구분(LOGIN/REGISTER/LOGOUT), 상태(성공/실패), 사번/성명/IP 검색으로 비정상 접속을 1초 만에 식별합니다.</a:t>
+              <a:t>• '신청단계 (일)', '승인단계 (일)', '확정단계 (일)', '검토완료 (일)' 4개 열로 완전 분리 집계!</a:t>
+            </a:r>
+            <a:br/>
+            <a:r>
+              <a:t>• 각 단계별 일수 합계(SUM 수식)가 하단에 자동 계산됩니다.</a:t>
+            </a:r>
+            <a:br/>
+            <a:r>
+              <a:t>• 확정 및 검토완료된 일수만 신속하게 발췌하여 급여에 반영할 수 있습니다.</a:t>
             </a:r>
           </a:p>
         </p:txBody>
@@ -6984,7 +8580,7 @@
               </a:defRPr>
             </a:pPr>
             <a:r>
-              <a:t>보안 체계 03</a:t>
+              <a:t>집계 규격 03</a:t>
             </a:r>
           </a:p>
           <a:p>
@@ -6999,22 +8595,30 @@
               </a:defRPr>
             </a:pPr>
             <a:r>
-              <a:t>3. 서식화된 엑셀(.xlsx) 내보내기</a:t>
+              <a:t>3. Sheet 4 [부서별_요약] 및 정산표</a:t>
             </a:r>
           </a:p>
           <a:p>
             <a:pPr>
               <a:lnSpc>
-                <a:spcPct val="130000"/>
+                <a:spcPct val="135000"/>
               </a:lnSpc>
-              <a:defRPr sz="1300">
+              <a:defRPr sz="1250">
                 <a:solidFill>
                   <a:srgbClr val="0F172A"/>
                 </a:solidFill>
               </a:defRPr>
             </a:pPr>
             <a:r>
-              <a:t>openpyxl 기반 컬러 배지(성공: 연녹색, 실패: 연빨강)가 적용된 감사 보고서 엑셀 파일을 원클릭으로 즉시 다운로드합니다.</a:t>
+              <a:t>• 부서별 요약 시트에도 4단계별 총 일수가 자동 집계되어 부서 간 진행 상황을 비교합니다.</a:t>
+            </a:r>
+            <a:br/>
+            <a:r>
+              <a:t>• 관리자 정산표 모달 및 정산 엑셀 파일에도 동일한 4단계 분리 컬럼이 지원됩니다.</a:t>
+            </a:r>
+            <a:br/>
+            <a:r>
+              <a:t>• 정산의 신뢰성과 데이터 정밀도가 비약적으로 향상되었습니다.</a:t>
             </a:r>
           </a:p>
         </p:txBody>

--- a/Overtime_Admin_Manual.pptx
+++ b/Overtime_Admin_Manual.pptx
@@ -3179,7 +3179,7 @@
               </a:defRPr>
             </a:pPr>
             <a:r>
-              <a:t>SMART OVERTIME SYSTEM v1.44  |  관리자 및 운영자 전용 가이드</a:t>
+              <a:t>SMART OVERTIME SYSTEM v1.45  |  관리자 및 운영자 전용 가이드</a:t>
             </a:r>
           </a:p>
           <a:p>
@@ -3198,7 +3198,7 @@
             </a:r>
             <a:br/>
             <a:r>
-              <a:t>관리자 모드 운영 매뉴얼 (v1.44)</a:t>
+              <a:t>관리자 모드 운영 매뉴얼 (v1.45)</a:t>
             </a:r>
           </a:p>
           <a:p>
@@ -3213,7 +3213,7 @@
               </a:defRPr>
             </a:pPr>
             <a:r>
-              <a:t>특근 4단계 라이프사이클(신청·승인·확정·검토), 엑셀 단계별 일수 구분 집계, 100% 무기명 소통함 운영까지 완벽 지원하는 관리자 공식 가이드입니다.</a:t>
+              <a:t>승인/확정/검토 독립 제어 및 수정 모달 관리, 4단계 일수 구분 집계, 100% 무기명 소통함 운영까지 완벽 지원하는 관리자 공식 가이드입니다.</a:t>
             </a:r>
           </a:p>
           <a:p>
@@ -3225,7 +3225,7 @@
               </a:defRPr>
             </a:pPr>
             <a:r>
-              <a:t>배포 버전: v1.44 (2026-09-21)  |  총괄 슈퍼관리자 및 부서 팀관리자 전용</a:t>
+              <a:t>배포 버전: v1.45 (2026-09-21)  |  총괄 슈퍼관리자 및 부서 팀관리자 전용</a:t>
             </a:r>
           </a:p>
         </p:txBody>
@@ -3278,7 +3278,7 @@
               </a:defRPr>
             </a:pPr>
             <a:r>
-              <a:t>STEP 09  |  사원 무기명 건의사항 소통함 운영 &amp; 답변 (v1.44 신규)</a:t>
+              <a:t>STEP 09  |  사원 무기명 건의사항 소통함 운영 &amp; 답변 (v1.45)</a:t>
             </a:r>
           </a:p>
           <a:p>
@@ -4974,7 +4974,7 @@
               </a:defRPr>
             </a:pPr>
             <a:r>
-              <a:t>자주 묻는 질문(Q&amp;A)과 관리자 운영 꿀팁 총정리 (v1.44)</a:t>
+              <a:t>자주 묻는 질문(Q&amp;A)과 관리자 운영 꿀팁 총정리 (v1.45)</a:t>
             </a:r>
           </a:p>
           <a:p>
@@ -5461,7 +5461,7 @@
               </a:defRPr>
             </a:pPr>
             <a:r>
-              <a:t>👉 네! Turso 클라우드 영구 DB 연동으로 모든 데이터가 안전 보존되며, v1.44의 안전 스마트 폴백과 스레드 보호로 특근 신청과 데이터 무결성을 완벽하게 보장합니다.</a:t>
+              <a:t>👉 네! Turso 클라우드 영구 DB 연동으로 모든 데이터가 안전 보존되며, v1.45의 안전 스마트 폴백과 스레드 보호로 특근 신청과 데이터 무결성을 완벽하게 보장합니다.</a:t>
             </a:r>
           </a:p>
         </p:txBody>
@@ -5544,7 +5544,7 @@
               </a:defRPr>
             </a:pPr>
             <a:r>
-              <a:t>Q6. 특근 4단계 라이프사이클에서 관리자의 [검토완료]는 어떤 의미인가요?</a:t>
+              <a:t>Q6. 특근 승인과 확정은 어떻게 운영되나요?</a:t>
             </a:r>
           </a:p>
           <a:p>
@@ -5556,7 +5556,7 @@
               </a:defRPr>
             </a:pPr>
             <a:r>
-              <a:t>👉 사원 및 관리자가 실제 특근 완료를 [확정]한 후, 관리자가 급여/노무 정산 직전 최종 검토하여 마감 처리했음을 공인하는 최종 단계입니다.</a:t>
+              <a:t>👉 v1.45부터 특근 승인과 확정은 완전히 독립 분리되었습니다. 관리자 사전 승인이 없어도 사원이 특근 완료 후 즉시 [특근완료 확정]을 할 수 있으며, 관리자는 테이블/캘린더/수정모달에서 승인, 확정, 검토완료를 각각 개별 제어 및 취소할 수 있습니다.</a:t>
             </a:r>
           </a:p>
         </p:txBody>
@@ -7791,7 +7791,7 @@
               </a:defRPr>
             </a:pPr>
             <a:r>
-              <a:t>STEP 07  |  특근 4단계 검증 체계 및 [검토완료] 마감 (v1.44 신규)</a:t>
+              <a:t>STEP 07  |  특근 확정 · 검토 종합 관리 및 개별 제어 (v1.45 최신)</a:t>
             </a:r>
           </a:p>
           <a:p>
@@ -7803,7 +7803,7 @@
               </a:defRPr>
             </a:pPr>
             <a:r>
-              <a:t>특근 4단계 검증 체계 및 관리자 [검토완료] 최종 마감</a:t>
+              <a:t>승인/확정/검토 독립 제어 및 수정 모달 종합 관리</a:t>
             </a:r>
           </a:p>
           <a:p>
@@ -7815,7 +7815,7 @@
               </a:defRPr>
             </a:pPr>
             <a:r>
-              <a:t>사원의 확정 피드백 검증, [검토완료] 원클릭 마감 및 상단 [일괄 확정/검토] 강력 지원</a:t>
+              <a:t>테이블/캘린더 원클릭 버튼 세트, 수정 모달 3대 상태 토글 및 일괄 처리 강력 지원</a:t>
             </a:r>
           </a:p>
         </p:txBody>
@@ -7913,7 +7913,7 @@
               </a:defRPr>
             </a:pPr>
             <a:r>
-              <a:t>1. 4단계 라이프사이클 통제</a:t>
+              <a:t>1. 원클릭 승인/확정/검토 개별 제어</a:t>
             </a:r>
           </a:p>
           <a:p>
@@ -7928,15 +7928,23 @@
               </a:defRPr>
             </a:pPr>
             <a:r>
-              <a:t>• 1단계(신청:회색), 2단계(승인:청색), 3단계(확정:주황), 4단계(검토완료:보라) 컬러 배지로 상태 직관 파악</a:t>
+              <a:t>• 관리자 테이블 및 캘린더 작업자 패널에 각 단계별 원클릭 버튼 세트 완비</a:t>
             </a:r>
             <a:br/>
             <a:r>
-              <a:t>• 테이블 검색 필터에서 4단계를 각각 선택하여 대기/완료 현황을 1초 만에 필터링 조회합니다.</a:t>
+              <a:t>• 승인: [✓ 승인] ↔ [✕ 취소] 자유 전환</a:t>
             </a:r>
             <a:br/>
             <a:r>
-              <a:t>• 미니 통계 칩에 신청, 승인, 확정, 검토완료 수량이 실시간 집계됩니다.</a:t>
+              <a:t>• 확정: [🎯 확정] ↔ [✕ 확정취소] 독립 제어</a:t>
+            </a:r>
+            <a:br/>
+            <a:r>
+              <a:t>• 검토: [🟣 검토완료] ↔ [✕ 검토취소] 최종 마감</a:t>
+            </a:r>
+            <a:br/>
+            <a:r>
+              <a:t>• 상태별 배지(승인, 확정, 검토)가 한눈에 표시됩니다.</a:t>
             </a:r>
           </a:p>
         </p:txBody>
@@ -8034,7 +8042,7 @@
               </a:defRPr>
             </a:pPr>
             <a:r>
-              <a:t>2. 건별 [🎯 확정] 및 [🟣 검토완료]</a:t>
+              <a:t>2. 관리자 특근 수정 모달 상태 직접 설정</a:t>
             </a:r>
           </a:p>
           <a:p>
@@ -8049,15 +8057,23 @@
               </a:defRPr>
             </a:pPr>
             <a:r>
-              <a:t>• 관리자가 사원을 대신해 직접 [🎯 확정] 버튼을 눌러 피드백을 처리할 수 있습니다.</a:t>
+              <a:t>• 테이블에서 [수정] 버튼 클릭 시 나타나는 [관리자 특근 수정 모달]에 '진행 상태 관리' 신설</a:t>
             </a:r>
             <a:br/>
             <a:r>
-              <a:t>• 사원 또는 관리자가 확정한 건에 대해 [🟣 검토완료] 버튼을 클릭해 최종 검토 마감 처리합니다.</a:t>
+              <a:t>• 1) 관리자 승인 (⏳ 대기 ↔ ✅ 승인)</a:t>
             </a:r>
             <a:br/>
             <a:r>
-              <a:t>• 검토완료 시 검토자 성명과 일시(예: 홍길동(09-21 14:00))가 안전 기록됩니다.</a:t>
+              <a:t>• 2) 특근완료 확정 (⚪ 미확정 ↔ 🎯 확정)</a:t>
+            </a:r>
+            <a:br/>
+            <a:r>
+              <a:t>• 3) 관리자 최종 검토 (⚪ 미검토 ↔ 🟣 검토)</a:t>
+            </a:r>
+            <a:br/>
+            <a:r>
+              <a:t>• 관리자가 세 플래그를 자유롭게 지정하여 안전 저장 가능!</a:t>
             </a:r>
           </a:p>
         </p:txBody>
@@ -8174,11 +8190,11 @@
             </a:r>
             <a:br/>
             <a:r>
-              <a:t>• 상단의 [🎯 일괄 확정] 또는 [🟣 일괄 검토완료] 버튼을 눌러 대량의 특근을 한 번에 마감!</a:t>
+              <a:t>• 상단의 [🎯 일괄 확정] 또는 [🟣 일괄 검토완료] 버튼을 눌러 대량의 특근을 한 번에 처리!</a:t>
             </a:r>
             <a:br/>
             <a:r>
-              <a:t>• 월말 및 분기별 대규모 정산 시 소요 시간을 90% 이상 단축합니다.</a:t>
+              <a:t>• 일괄 확정 및 일괄 검토완료 시 진행 카운트 및 감사 로그(Audit Log)가 자동 기록됩니다.</a:t>
             </a:r>
           </a:p>
         </p:txBody>
@@ -8231,7 +8247,7 @@
               </a:defRPr>
             </a:pPr>
             <a:r>
-              <a:t>STEP 08  |  특근정보 엑셀 내보내기 4단계 구분 집계 (v1.44 신규)</a:t>
+              <a:t>STEP 08  |  특근정보 엑셀 내보내기 4단계 구분 집계 (v1.45)</a:t>
             </a:r>
           </a:p>
           <a:p>

--- a/Overtime_Admin_Manual.pptx
+++ b/Overtime_Admin_Manual.pptx
@@ -8384,7 +8384,7 @@
               </a:defRPr>
             </a:pPr>
             <a:r>
-              <a:t>• 4단계 진행상태 열(신청:회색, 승인:청색, 확정:주황, 검토완료:보라) 컬러 스타일 적용</a:t>
+              <a:t>• 4단계 진행상태 열(신청:호박, 승인:청색, 확정:초록, 검토완료:보라) 컬러 스타일 적용</a:t>
             </a:r>
             <a:br/>
             <a:r>
@@ -8505,15 +8505,15 @@
               </a:defRPr>
             </a:pPr>
             <a:r>
-              <a:t>• '신청단계 (일)', '승인단계 (일)', '확정단계 (일)', '검토완료 (일)' 4개 열로 완전 분리 집계!</a:t>
+              <a:t>• [신청/승인/확정/검토완료] 4개 단계별 '최종 실특근일+보너스 [일]'이 각각 별도 계산!</a:t>
             </a:r>
             <a:br/>
             <a:r>
-              <a:t>• 각 단계별 일수 합계(SUM 수식)가 하단에 자동 계산됩니다.</a:t>
+              <a:t>• 신청단계 헤더를 짙은 호박색(Amber)으로 변경하여 글자 시인성을 극대화(고대비 보장)!</a:t>
             </a:r>
             <a:br/>
             <a:r>
-              <a:t>• 확정 및 검토완료된 일수만 신속하게 발췌하여 급여에 반영할 수 있습니다.</a:t>
+              <a:t>• 각 단계별 합계(SUM 수식)가 하단에 자동 계산되어 원하는 단계의 실특근일만 즉시 확인 가능합니다.</a:t>
             </a:r>
           </a:p>
         </p:txBody>
@@ -8626,11 +8626,11 @@
               </a:defRPr>
             </a:pPr>
             <a:r>
-              <a:t>• 부서별 요약 시트에도 4단계별 총 일수가 자동 집계되어 부서 간 진행 상황을 비교합니다.</a:t>
+              <a:t>• 부서별 요약 시트에도 4단계별 최종 실특근일+보너스 합계가 자동 집계됩니다.</a:t>
             </a:r>
             <a:br/>
             <a:r>
-              <a:t>• 관리자 정산표 모달 및 정산 엑셀 파일에도 동일한 4단계 분리 컬럼이 지원됩니다.</a:t>
+              <a:t>• 관리자 정산표 모달 및 정산 엑셀 파일에도 동일한 4단계 분리 및 고대비 서식이 완벽 적용됩니다.</a:t>
             </a:r>
             <a:br/>
             <a:r>

--- a/Overtime_Admin_Manual.pptx
+++ b/Overtime_Admin_Manual.pptx
@@ -3179,7 +3179,7 @@
               </a:defRPr>
             </a:pPr>
             <a:r>
-              <a:t>SMART OVERTIME SYSTEM v1.45  |  관리자 및 운영자 전용 가이드</a:t>
+              <a:t>SMART OVERTIME SYSTEM v1.46  |  관리자 및 운영자 전용 가이드</a:t>
             </a:r>
           </a:p>
           <a:p>
@@ -3198,7 +3198,7 @@
             </a:r>
             <a:br/>
             <a:r>
-              <a:t>관리자 모드 운영 매뉴얼 (v1.45)</a:t>
+              <a:t>관리자 모드 운영 매뉴얼 (v1.46)</a:t>
             </a:r>
           </a:p>
           <a:p>
@@ -3225,7 +3225,7 @@
               </a:defRPr>
             </a:pPr>
             <a:r>
-              <a:t>배포 버전: v1.45 (2026-09-21)  |  총괄 슈퍼관리자 및 부서 팀관리자 전용</a:t>
+              <a:t>배포 버전: v1.46 (2026-09-21)  |  총괄 슈퍼관리자 및 부서 팀관리자 전용</a:t>
             </a:r>
           </a:p>
         </p:txBody>
@@ -3278,7 +3278,7 @@
               </a:defRPr>
             </a:pPr>
             <a:r>
-              <a:t>STEP 09  |  사원 무기명 건의사항 소통함 운영 &amp; 답변 (v1.45)</a:t>
+              <a:t>STEP 09  |  사원 무기명 건의사항 소통함 운영 &amp; 답변 (v1.46)</a:t>
             </a:r>
           </a:p>
           <a:p>
@@ -4974,7 +4974,7 @@
               </a:defRPr>
             </a:pPr>
             <a:r>
-              <a:t>자주 묻는 질문(Q&amp;A)과 관리자 운영 꿀팁 총정리 (v1.45)</a:t>
+              <a:t>자주 묻는 질문(Q&amp;A)과 관리자 운영 꿀팁 총정리 (v1.46)</a:t>
             </a:r>
           </a:p>
           <a:p>
@@ -5461,7 +5461,7 @@
               </a:defRPr>
             </a:pPr>
             <a:r>
-              <a:t>👉 네! Turso 클라우드 영구 DB 연동으로 모든 데이터가 안전 보존되며, v1.45의 안전 스마트 폴백과 스레드 보호로 특근 신청과 데이터 무결성을 완벽하게 보장합니다.</a:t>
+              <a:t>👉 네! Turso 클라우드 영구 DB 연동으로 모든 데이터가 안전 보존되며, v1.46의 안전 스마트 폴백과 스레드 보호로 특근 신청과 데이터 무결성을 완벽하게 보장합니다.</a:t>
             </a:r>
           </a:p>
         </p:txBody>
@@ -5556,7 +5556,7 @@
               </a:defRPr>
             </a:pPr>
             <a:r>
-              <a:t>👉 v1.45부터 특근 승인과 확정은 완전히 독립 분리되었습니다. 관리자 사전 승인이 없어도 사원이 특근 완료 후 즉시 [특근완료 확정]을 할 수 있으며, 관리자는 테이블/캘린더/수정모달에서 승인, 확정, 검토완료를 각각 개별 제어 및 취소할 수 있습니다.</a:t>
+              <a:t>👉 v1.46부터 특근 승인과 확정은 완전히 독립 분리되었습니다. 관리자 사전 승인이 없어도 사원이 특근 완료 후 즉시 [특근완료 확정]을 할 수 있으며, 관리자는 테이블/캘린더/수정모달에서 승인, 확정, 검토완료를 각각 개별 제어 및 취소할 수 있습니다.</a:t>
             </a:r>
           </a:p>
         </p:txBody>
@@ -7791,7 +7791,7 @@
               </a:defRPr>
             </a:pPr>
             <a:r>
-              <a:t>STEP 07  |  특근 확정 · 검토 종합 관리 및 개별 제어 (v1.45 최신)</a:t>
+              <a:t>STEP 07  |  특근 확정 · 검토 종합 관리 및 개별 제어 (v1.46 최신)</a:t>
             </a:r>
           </a:p>
           <a:p>
@@ -8247,7 +8247,7 @@
               </a:defRPr>
             </a:pPr>
             <a:r>
-              <a:t>STEP 08  |  특근정보 엑셀 내보내기 4단계 구분 집계 (v1.45)</a:t>
+              <a:t>STEP 08  |  특근정보 엑셀 내보내기 4단계 구분 집계 (v1.46)</a:t>
             </a:r>
           </a:p>
           <a:p>

--- a/Overtime_Admin_Manual.pptx
+++ b/Overtime_Admin_Manual.pptx
@@ -3179,7 +3179,7 @@
               </a:defRPr>
             </a:pPr>
             <a:r>
-              <a:t>SMART OVERTIME SYSTEM v1.46  |  관리자 및 운영자 전용 가이드</a:t>
+              <a:t>SMART OVERTIME SYSTEM v1.47  |  관리자 및 운영자 전용 가이드</a:t>
             </a:r>
           </a:p>
           <a:p>
@@ -3198,7 +3198,7 @@
             </a:r>
             <a:br/>
             <a:r>
-              <a:t>관리자 모드 운영 매뉴얼 (v1.46)</a:t>
+              <a:t>관리자 모드 운영 매뉴얼 (v1.47)</a:t>
             </a:r>
           </a:p>
           <a:p>
@@ -3225,7 +3225,7 @@
               </a:defRPr>
             </a:pPr>
             <a:r>
-              <a:t>배포 버전: v1.46 (2026-09-21)  |  총괄 슈퍼관리자 및 부서 팀관리자 전용</a:t>
+              <a:t>배포 버전: v1.47 (2026-09-21)  |  총괄 슈퍼관리자 및 부서 팀관리자 전용</a:t>
             </a:r>
           </a:p>
         </p:txBody>
@@ -3278,7 +3278,7 @@
               </a:defRPr>
             </a:pPr>
             <a:r>
-              <a:t>STEP 09  |  사원 무기명 건의사항 소통함 운영 &amp; 답변 (v1.46)</a:t>
+              <a:t>STEP 09  |  사원 무기명 건의사항 소통함 운영 &amp; 답변 (v1.47)</a:t>
             </a:r>
           </a:p>
           <a:p>
@@ -4974,7 +4974,7 @@
               </a:defRPr>
             </a:pPr>
             <a:r>
-              <a:t>자주 묻는 질문(Q&amp;A)과 관리자 운영 꿀팁 총정리 (v1.46)</a:t>
+              <a:t>자주 묻는 질문(Q&amp;A)과 관리자 운영 꿀팁 총정리 (v1.47)</a:t>
             </a:r>
           </a:p>
           <a:p>
@@ -5461,7 +5461,7 @@
               </a:defRPr>
             </a:pPr>
             <a:r>
-              <a:t>👉 네! Turso 클라우드 영구 DB 연동으로 모든 데이터가 안전 보존되며, v1.46의 안전 스마트 폴백과 스레드 보호로 특근 신청과 데이터 무결성을 완벽하게 보장합니다.</a:t>
+              <a:t>👉 네! Turso 클라우드 영구 DB 연동으로 모든 데이터가 안전 보존되며, v1.47의 안전 스마트 폴백과 스레드 보호로 특근 신청과 데이터 무결성을 완벽하게 보장합니다.</a:t>
             </a:r>
           </a:p>
         </p:txBody>
@@ -5556,7 +5556,7 @@
               </a:defRPr>
             </a:pPr>
             <a:r>
-              <a:t>👉 v1.46부터 특근 승인과 확정은 완전히 독립 분리되었습니다. 관리자 사전 승인이 없어도 사원이 특근 완료 후 즉시 [특근완료 확정]을 할 수 있으며, 관리자는 테이블/캘린더/수정모달에서 승인, 확정, 검토완료를 각각 개별 제어 및 취소할 수 있습니다.</a:t>
+              <a:t>👉 v1.47부터 특근 승인과 확정은 완전히 독립 분리되었습니다. 관리자 사전 승인이 없어도 사원이 특근 완료 후 즉시 [특근완료 확정]을 할 수 있으며, 관리자는 테이블/캘린더/수정모달에서 승인, 확정, 검토완료를 각각 개별 제어 및 취소할 수 있습니다.</a:t>
             </a:r>
           </a:p>
         </p:txBody>
@@ -7791,7 +7791,7 @@
               </a:defRPr>
             </a:pPr>
             <a:r>
-              <a:t>STEP 07  |  특근 확정 · 검토 종합 관리 및 개별 제어 (v1.46 최신)</a:t>
+              <a:t>STEP 07  |  특근 확정 · 검토 종합 관리 및 개별 제어 (v1.47 최신)</a:t>
             </a:r>
           </a:p>
           <a:p>
@@ -8247,7 +8247,7 @@
               </a:defRPr>
             </a:pPr>
             <a:r>
-              <a:t>STEP 08  |  특근정보 엑셀 내보내기 4단계 구분 집계 (v1.46)</a:t>
+              <a:t>STEP 08  |  특근정보 엑셀 내보내기 4단계 구분 집계 (v1.47)</a:t>
             </a:r>
           </a:p>
           <a:p>

--- a/Overtime_Admin_Manual.pptx
+++ b/Overtime_Admin_Manual.pptx
@@ -3352,7 +3352,7 @@
         </p:nvSpPr>
         <p:spPr>
           <a:xfrm>
-            <a:off x="685800" y="1463040"/>
+            <a:off x="685800" y="1417320"/>
             <a:ext cx="2926080" cy="4937760"/>
           </a:xfrm>
           <a:prstGeom prst="rect">
@@ -3383,7 +3383,7 @@
           <a:p>
             <a:pPr>
               <a:spcAft>
-                <a:spcPts val="800"/>
+                <a:spcPts val="600"/>
               </a:spcAft>
               <a:defRPr sz="1050">
                 <a:solidFill>
@@ -3413,7 +3413,7 @@
           <a:p>
             <a:pPr>
               <a:spcAft>
-                <a:spcPts val="800"/>
+                <a:spcPts val="600"/>
               </a:spcAft>
               <a:defRPr sz="1050">
                 <a:solidFill>
@@ -3443,7 +3443,7 @@
           <a:p>
             <a:pPr>
               <a:spcAft>
-                <a:spcPts val="800"/>
+                <a:spcPts val="600"/>
               </a:spcAft>
               <a:defRPr sz="1050">
                 <a:solidFill>
@@ -3473,7 +3473,7 @@
           <a:p>
             <a:pPr>
               <a:spcAft>
-                <a:spcPts val="800"/>
+                <a:spcPts val="600"/>
               </a:spcAft>
               <a:defRPr sz="1050">
                 <a:solidFill>
@@ -3641,7 +3641,7 @@
         </p:nvSpPr>
         <p:spPr>
           <a:xfrm>
-            <a:off x="685800" y="1463040"/>
+            <a:off x="685800" y="1417320"/>
             <a:ext cx="2926080" cy="4937760"/>
           </a:xfrm>
           <a:prstGeom prst="rect">
@@ -3672,7 +3672,7 @@
           <a:p>
             <a:pPr>
               <a:spcAft>
-                <a:spcPts val="800"/>
+                <a:spcPts val="600"/>
               </a:spcAft>
               <a:defRPr sz="1050">
                 <a:solidFill>
@@ -3702,7 +3702,7 @@
           <a:p>
             <a:pPr>
               <a:spcAft>
-                <a:spcPts val="800"/>
+                <a:spcPts val="600"/>
               </a:spcAft>
               <a:defRPr sz="1050">
                 <a:solidFill>
@@ -3732,7 +3732,7 @@
           <a:p>
             <a:pPr>
               <a:spcAft>
-                <a:spcPts val="800"/>
+                <a:spcPts val="600"/>
               </a:spcAft>
               <a:defRPr sz="1050">
                 <a:solidFill>
@@ -3762,7 +3762,7 @@
           <a:p>
             <a:pPr>
               <a:spcAft>
-                <a:spcPts val="800"/>
+                <a:spcPts val="600"/>
               </a:spcAft>
               <a:defRPr sz="1050">
                 <a:solidFill>
@@ -3930,7 +3930,7 @@
         </p:nvSpPr>
         <p:spPr>
           <a:xfrm>
-            <a:off x="685800" y="1463040"/>
+            <a:off x="685800" y="1417320"/>
             <a:ext cx="2926080" cy="4937760"/>
           </a:xfrm>
           <a:prstGeom prst="rect">
@@ -3961,7 +3961,7 @@
           <a:p>
             <a:pPr>
               <a:spcAft>
-                <a:spcPts val="800"/>
+                <a:spcPts val="600"/>
               </a:spcAft>
               <a:defRPr sz="1050">
                 <a:solidFill>
@@ -3991,7 +3991,7 @@
           <a:p>
             <a:pPr>
               <a:spcAft>
-                <a:spcPts val="800"/>
+                <a:spcPts val="600"/>
               </a:spcAft>
               <a:defRPr sz="1050">
                 <a:solidFill>
@@ -4021,7 +4021,7 @@
           <a:p>
             <a:pPr>
               <a:spcAft>
-                <a:spcPts val="800"/>
+                <a:spcPts val="600"/>
               </a:spcAft>
               <a:defRPr sz="1050">
                 <a:solidFill>
@@ -4051,7 +4051,7 @@
           <a:p>
             <a:pPr>
               <a:spcAft>
-                <a:spcPts val="800"/>
+                <a:spcPts val="600"/>
               </a:spcAft>
               <a:defRPr sz="1050">
                 <a:solidFill>
@@ -4219,7 +4219,7 @@
         </p:nvSpPr>
         <p:spPr>
           <a:xfrm>
-            <a:off x="685800" y="1463040"/>
+            <a:off x="685800" y="1417320"/>
             <a:ext cx="2926080" cy="4937760"/>
           </a:xfrm>
           <a:prstGeom prst="rect">
@@ -4250,7 +4250,7 @@
           <a:p>
             <a:pPr>
               <a:spcAft>
-                <a:spcPts val="800"/>
+                <a:spcPts val="600"/>
               </a:spcAft>
               <a:defRPr sz="1050">
                 <a:solidFill>
@@ -4280,7 +4280,7 @@
           <a:p>
             <a:pPr>
               <a:spcAft>
-                <a:spcPts val="800"/>
+                <a:spcPts val="600"/>
               </a:spcAft>
               <a:defRPr sz="1050">
                 <a:solidFill>
@@ -4310,7 +4310,7 @@
           <a:p>
             <a:pPr>
               <a:spcAft>
-                <a:spcPts val="800"/>
+                <a:spcPts val="600"/>
               </a:spcAft>
               <a:defRPr sz="1050">
                 <a:solidFill>
@@ -4340,7 +4340,7 @@
           <a:p>
             <a:pPr>
               <a:spcAft>
-                <a:spcPts val="800"/>
+                <a:spcPts val="600"/>
               </a:spcAft>
               <a:defRPr sz="1050">
                 <a:solidFill>
@@ -4508,7 +4508,7 @@
         </p:nvSpPr>
         <p:spPr>
           <a:xfrm>
-            <a:off x="685800" y="1463040"/>
+            <a:off x="685800" y="1417320"/>
             <a:ext cx="2926080" cy="4937760"/>
           </a:xfrm>
           <a:prstGeom prst="rect">
@@ -4539,7 +4539,7 @@
           <a:p>
             <a:pPr>
               <a:spcAft>
-                <a:spcPts val="800"/>
+                <a:spcPts val="600"/>
               </a:spcAft>
               <a:defRPr sz="1050">
                 <a:solidFill>
@@ -4569,7 +4569,7 @@
           <a:p>
             <a:pPr>
               <a:spcAft>
-                <a:spcPts val="800"/>
+                <a:spcPts val="600"/>
               </a:spcAft>
               <a:defRPr sz="1050">
                 <a:solidFill>
@@ -4599,7 +4599,7 @@
           <a:p>
             <a:pPr>
               <a:spcAft>
-                <a:spcPts val="800"/>
+                <a:spcPts val="600"/>
               </a:spcAft>
               <a:defRPr sz="1050">
                 <a:solidFill>
@@ -4629,7 +4629,7 @@
           <a:p>
             <a:pPr>
               <a:spcAft>
-                <a:spcPts val="800"/>
+                <a:spcPts val="600"/>
               </a:spcAft>
               <a:defRPr sz="1050">
                 <a:solidFill>
